--- a/UI: UX/COLLABX UI:UX.pptx
+++ b/UI: UX/COLLABX UI:UX.pptx
@@ -5,18 +5,18 @@
     <p:sldMasterId id="2147483648" r:id="rId1"/>
   </p:sldMasterIdLst>
   <p:sldIdLst>
-    <p:sldId id="256" r:id="rId7"/>
-    <p:sldId id="257" r:id="rId8"/>
-    <p:sldId id="258" r:id="rId9"/>
-    <p:sldId id="259" r:id="rId10"/>
-    <p:sldId id="260" r:id="rId11"/>
-    <p:sldId id="261" r:id="rId12"/>
-    <p:sldId id="262" r:id="rId13"/>
-    <p:sldId id="263" r:id="rId14"/>
-    <p:sldId id="264" r:id="rId15"/>
-    <p:sldId id="265" r:id="rId16"/>
+    <p:sldId id="256" r:id="rId2"/>
+    <p:sldId id="257" r:id="rId3"/>
+    <p:sldId id="258" r:id="rId4"/>
+    <p:sldId id="259" r:id="rId5"/>
+    <p:sldId id="260" r:id="rId6"/>
+    <p:sldId id="261" r:id="rId7"/>
+    <p:sldId id="262" r:id="rId8"/>
+    <p:sldId id="263" r:id="rId9"/>
+    <p:sldId id="264" r:id="rId10"/>
+    <p:sldId id="265" r:id="rId11"/>
   </p:sldIdLst>
-  <p:sldSz cx="12188952" cy="6858000" type="screen4x3"/>
+  <p:sldSz cx="12188825" cy="6858000"/>
   <p:notesSz cx="6858000" cy="9144000"/>
   <p:defaultTextStyle>
     <a:defPPr>
@@ -113,6 +113,22 @@
       </a:defRPr>
     </a:lvl9pPr>
   </p:defaultTextStyle>
+  <p:extLst>
+    <p:ext uri="{EFAFB233-063F-42B5-8137-9DF3F51BA10A}">
+      <p15:sldGuideLst xmlns:p15="http://schemas.microsoft.com/office/powerpoint/2012/main">
+        <p15:guide id="1" orient="horz" pos="2160">
+          <p15:clr>
+            <a:srgbClr val="A4A3A4"/>
+          </p15:clr>
+        </p15:guide>
+        <p15:guide id="2" pos="2880">
+          <p15:clr>
+            <a:srgbClr val="A4A3A4"/>
+          </p15:clr>
+        </p15:guide>
+      </p15:sldGuideLst>
+    </p:ext>
+  </p:extLst>
 </p:presentation>
 </file>
 
@@ -154,10 +170,9 @@
           <a:lstStyle/>
           <a:p>
             <a:r>
-              <a:rPr lang="en-US" smtClean="0"/>
+              <a:rPr lang="en-US"/>
               <a:t>Click to edit Master title style</a:t>
             </a:r>
-            <a:endParaRPr lang="en-US"/>
           </a:p>
         </p:txBody>
       </p:sp>
@@ -273,10 +288,9 @@
           </a:lstStyle>
           <a:p>
             <a:r>
-              <a:rPr lang="en-US" smtClean="0"/>
+              <a:rPr lang="en-US"/>
               <a:t>Click to edit Master subtitle style</a:t>
             </a:r>
-            <a:endParaRPr lang="en-US"/>
           </a:p>
         </p:txBody>
       </p:sp>
@@ -297,7 +311,7 @@
           <a:p>
             <a:fld id="{5BCAD085-E8A6-8845-BD4E-CB4CCA059FC4}" type="datetimeFigureOut">
               <a:rPr lang="en-US" smtClean="0"/>
-              <a:t>1/27/13</a:t>
+              <a:t>4/27/26</a:t>
             </a:fld>
             <a:endParaRPr lang="en-US"/>
           </a:p>
@@ -391,10 +405,9 @@
           <a:lstStyle/>
           <a:p>
             <a:r>
-              <a:rPr lang="en-US" smtClean="0"/>
+              <a:rPr lang="en-US"/>
               <a:t>Click to edit Master title style</a:t>
             </a:r>
-            <a:endParaRPr lang="en-US"/>
           </a:p>
         </p:txBody>
       </p:sp>
@@ -415,38 +428,37 @@
           <a:p>
             <a:pPr lvl="0"/>
             <a:r>
-              <a:rPr lang="en-US" smtClean="0"/>
+              <a:rPr lang="en-US"/>
               <a:t>Click to edit Master text styles</a:t>
             </a:r>
           </a:p>
           <a:p>
             <a:pPr lvl="1"/>
             <a:r>
-              <a:rPr lang="en-US" smtClean="0"/>
+              <a:rPr lang="en-US"/>
               <a:t>Second level</a:t>
             </a:r>
           </a:p>
           <a:p>
             <a:pPr lvl="2"/>
             <a:r>
-              <a:rPr lang="en-US" smtClean="0"/>
+              <a:rPr lang="en-US"/>
               <a:t>Third level</a:t>
             </a:r>
           </a:p>
           <a:p>
             <a:pPr lvl="3"/>
             <a:r>
-              <a:rPr lang="en-US" smtClean="0"/>
+              <a:rPr lang="en-US"/>
               <a:t>Fourth level</a:t>
             </a:r>
           </a:p>
           <a:p>
             <a:pPr lvl="4"/>
             <a:r>
-              <a:rPr lang="en-US" smtClean="0"/>
+              <a:rPr lang="en-US"/>
               <a:t>Fifth level</a:t>
             </a:r>
-            <a:endParaRPr lang="en-US"/>
           </a:p>
         </p:txBody>
       </p:sp>
@@ -467,7 +479,7 @@
           <a:p>
             <a:fld id="{5BCAD085-E8A6-8845-BD4E-CB4CCA059FC4}" type="datetimeFigureOut">
               <a:rPr lang="en-US" smtClean="0"/>
-              <a:t>1/27/13</a:t>
+              <a:t>4/27/26</a:t>
             </a:fld>
             <a:endParaRPr lang="en-US"/>
           </a:p>
@@ -566,10 +578,9 @@
           <a:lstStyle/>
           <a:p>
             <a:r>
-              <a:rPr lang="en-US" smtClean="0"/>
+              <a:rPr lang="en-US"/>
               <a:t>Click to edit Master title style</a:t>
             </a:r>
-            <a:endParaRPr lang="en-US"/>
           </a:p>
         </p:txBody>
       </p:sp>
@@ -595,38 +606,37 @@
           <a:p>
             <a:pPr lvl="0"/>
             <a:r>
-              <a:rPr lang="en-US" smtClean="0"/>
+              <a:rPr lang="en-US"/>
               <a:t>Click to edit Master text styles</a:t>
             </a:r>
           </a:p>
           <a:p>
             <a:pPr lvl="1"/>
             <a:r>
-              <a:rPr lang="en-US" smtClean="0"/>
+              <a:rPr lang="en-US"/>
               <a:t>Second level</a:t>
             </a:r>
           </a:p>
           <a:p>
             <a:pPr lvl="2"/>
             <a:r>
-              <a:rPr lang="en-US" smtClean="0"/>
+              <a:rPr lang="en-US"/>
               <a:t>Third level</a:t>
             </a:r>
           </a:p>
           <a:p>
             <a:pPr lvl="3"/>
             <a:r>
-              <a:rPr lang="en-US" smtClean="0"/>
+              <a:rPr lang="en-US"/>
               <a:t>Fourth level</a:t>
             </a:r>
           </a:p>
           <a:p>
             <a:pPr lvl="4"/>
             <a:r>
-              <a:rPr lang="en-US" smtClean="0"/>
+              <a:rPr lang="en-US"/>
               <a:t>Fifth level</a:t>
             </a:r>
-            <a:endParaRPr lang="en-US"/>
           </a:p>
         </p:txBody>
       </p:sp>
@@ -647,7 +657,7 @@
           <a:p>
             <a:fld id="{5BCAD085-E8A6-8845-BD4E-CB4CCA059FC4}" type="datetimeFigureOut">
               <a:rPr lang="en-US" smtClean="0"/>
-              <a:t>1/27/13</a:t>
+              <a:t>4/27/26</a:t>
             </a:fld>
             <a:endParaRPr lang="en-US"/>
           </a:p>
@@ -741,10 +751,9 @@
           <a:lstStyle/>
           <a:p>
             <a:r>
-              <a:rPr lang="en-US" smtClean="0"/>
+              <a:rPr lang="en-US"/>
               <a:t>Click to edit Master title style</a:t>
             </a:r>
-            <a:endParaRPr lang="en-US"/>
           </a:p>
         </p:txBody>
       </p:sp>
@@ -765,38 +774,37 @@
           <a:p>
             <a:pPr lvl="0"/>
             <a:r>
-              <a:rPr lang="en-US" smtClean="0"/>
+              <a:rPr lang="en-US"/>
               <a:t>Click to edit Master text styles</a:t>
             </a:r>
           </a:p>
           <a:p>
             <a:pPr lvl="1"/>
             <a:r>
-              <a:rPr lang="en-US" smtClean="0"/>
+              <a:rPr lang="en-US"/>
               <a:t>Second level</a:t>
             </a:r>
           </a:p>
           <a:p>
             <a:pPr lvl="2"/>
             <a:r>
-              <a:rPr lang="en-US" smtClean="0"/>
+              <a:rPr lang="en-US"/>
               <a:t>Third level</a:t>
             </a:r>
           </a:p>
           <a:p>
             <a:pPr lvl="3"/>
             <a:r>
-              <a:rPr lang="en-US" smtClean="0"/>
+              <a:rPr lang="en-US"/>
               <a:t>Fourth level</a:t>
             </a:r>
           </a:p>
           <a:p>
             <a:pPr lvl="4"/>
             <a:r>
-              <a:rPr lang="en-US" smtClean="0"/>
+              <a:rPr lang="en-US"/>
               <a:t>Fifth level</a:t>
             </a:r>
-            <a:endParaRPr lang="en-US"/>
           </a:p>
         </p:txBody>
       </p:sp>
@@ -817,7 +825,7 @@
           <a:p>
             <a:fld id="{5BCAD085-E8A6-8845-BD4E-CB4CCA059FC4}" type="datetimeFigureOut">
               <a:rPr lang="en-US" smtClean="0"/>
-              <a:t>1/27/13</a:t>
+              <a:t>4/27/26</a:t>
             </a:fld>
             <a:endParaRPr lang="en-US"/>
           </a:p>
@@ -920,10 +928,9 @@
           </a:lstStyle>
           <a:p>
             <a:r>
-              <a:rPr lang="en-US" smtClean="0"/>
+              <a:rPr lang="en-US"/>
               <a:t>Click to edit Master title style</a:t>
             </a:r>
-            <a:endParaRPr lang="en-US"/>
           </a:p>
         </p:txBody>
       </p:sp>
@@ -1040,7 +1047,7 @@
           <a:p>
             <a:pPr lvl="0"/>
             <a:r>
-              <a:rPr lang="en-US" smtClean="0"/>
+              <a:rPr lang="en-US"/>
               <a:t>Click to edit Master text styles</a:t>
             </a:r>
           </a:p>
@@ -1063,7 +1070,7 @@
           <a:p>
             <a:fld id="{5BCAD085-E8A6-8845-BD4E-CB4CCA059FC4}" type="datetimeFigureOut">
               <a:rPr lang="en-US" smtClean="0"/>
-              <a:t>1/27/13</a:t>
+              <a:t>4/27/26</a:t>
             </a:fld>
             <a:endParaRPr lang="en-US"/>
           </a:p>
@@ -1157,10 +1164,9 @@
           <a:lstStyle/>
           <a:p>
             <a:r>
-              <a:rPr lang="en-US" smtClean="0"/>
+              <a:rPr lang="en-US"/>
               <a:t>Click to edit Master title style</a:t>
             </a:r>
-            <a:endParaRPr lang="en-US"/>
           </a:p>
         </p:txBody>
       </p:sp>
@@ -1214,38 +1220,37 @@
           <a:p>
             <a:pPr lvl="0"/>
             <a:r>
-              <a:rPr lang="en-US" smtClean="0"/>
+              <a:rPr lang="en-US"/>
               <a:t>Click to edit Master text styles</a:t>
             </a:r>
           </a:p>
           <a:p>
             <a:pPr lvl="1"/>
             <a:r>
-              <a:rPr lang="en-US" smtClean="0"/>
+              <a:rPr lang="en-US"/>
               <a:t>Second level</a:t>
             </a:r>
           </a:p>
           <a:p>
             <a:pPr lvl="2"/>
             <a:r>
-              <a:rPr lang="en-US" smtClean="0"/>
+              <a:rPr lang="en-US"/>
               <a:t>Third level</a:t>
             </a:r>
           </a:p>
           <a:p>
             <a:pPr lvl="3"/>
             <a:r>
-              <a:rPr lang="en-US" smtClean="0"/>
+              <a:rPr lang="en-US"/>
               <a:t>Fourth level</a:t>
             </a:r>
           </a:p>
           <a:p>
             <a:pPr lvl="4"/>
             <a:r>
-              <a:rPr lang="en-US" smtClean="0"/>
+              <a:rPr lang="en-US"/>
               <a:t>Fifth level</a:t>
             </a:r>
-            <a:endParaRPr lang="en-US"/>
           </a:p>
         </p:txBody>
       </p:sp>
@@ -1299,38 +1304,37 @@
           <a:p>
             <a:pPr lvl="0"/>
             <a:r>
-              <a:rPr lang="en-US" smtClean="0"/>
+              <a:rPr lang="en-US"/>
               <a:t>Click to edit Master text styles</a:t>
             </a:r>
           </a:p>
           <a:p>
             <a:pPr lvl="1"/>
             <a:r>
-              <a:rPr lang="en-US" smtClean="0"/>
+              <a:rPr lang="en-US"/>
               <a:t>Second level</a:t>
             </a:r>
           </a:p>
           <a:p>
             <a:pPr lvl="2"/>
             <a:r>
-              <a:rPr lang="en-US" smtClean="0"/>
+              <a:rPr lang="en-US"/>
               <a:t>Third level</a:t>
             </a:r>
           </a:p>
           <a:p>
             <a:pPr lvl="3"/>
             <a:r>
-              <a:rPr lang="en-US" smtClean="0"/>
+              <a:rPr lang="en-US"/>
               <a:t>Fourth level</a:t>
             </a:r>
           </a:p>
           <a:p>
             <a:pPr lvl="4"/>
             <a:r>
-              <a:rPr lang="en-US" smtClean="0"/>
+              <a:rPr lang="en-US"/>
               <a:t>Fifth level</a:t>
             </a:r>
-            <a:endParaRPr lang="en-US"/>
           </a:p>
         </p:txBody>
       </p:sp>
@@ -1351,7 +1355,7 @@
           <a:p>
             <a:fld id="{5BCAD085-E8A6-8845-BD4E-CB4CCA059FC4}" type="datetimeFigureOut">
               <a:rPr lang="en-US" smtClean="0"/>
-              <a:t>1/27/13</a:t>
+              <a:t>4/27/26</a:t>
             </a:fld>
             <a:endParaRPr lang="en-US"/>
           </a:p>
@@ -1449,10 +1453,9 @@
           </a:lstStyle>
           <a:p>
             <a:r>
-              <a:rPr lang="en-US" smtClean="0"/>
+              <a:rPr lang="en-US"/>
               <a:t>Click to edit Master title style</a:t>
             </a:r>
-            <a:endParaRPr lang="en-US"/>
           </a:p>
         </p:txBody>
       </p:sp>
@@ -1515,7 +1518,7 @@
           <a:p>
             <a:pPr lvl="0"/>
             <a:r>
-              <a:rPr lang="en-US" smtClean="0"/>
+              <a:rPr lang="en-US"/>
               <a:t>Click to edit Master text styles</a:t>
             </a:r>
           </a:p>
@@ -1571,38 +1574,37 @@
           <a:p>
             <a:pPr lvl="0"/>
             <a:r>
-              <a:rPr lang="en-US" smtClean="0"/>
+              <a:rPr lang="en-US"/>
               <a:t>Click to edit Master text styles</a:t>
             </a:r>
           </a:p>
           <a:p>
             <a:pPr lvl="1"/>
             <a:r>
-              <a:rPr lang="en-US" smtClean="0"/>
+              <a:rPr lang="en-US"/>
               <a:t>Second level</a:t>
             </a:r>
           </a:p>
           <a:p>
             <a:pPr lvl="2"/>
             <a:r>
-              <a:rPr lang="en-US" smtClean="0"/>
+              <a:rPr lang="en-US"/>
               <a:t>Third level</a:t>
             </a:r>
           </a:p>
           <a:p>
             <a:pPr lvl="3"/>
             <a:r>
-              <a:rPr lang="en-US" smtClean="0"/>
+              <a:rPr lang="en-US"/>
               <a:t>Fourth level</a:t>
             </a:r>
           </a:p>
           <a:p>
             <a:pPr lvl="4"/>
             <a:r>
-              <a:rPr lang="en-US" smtClean="0"/>
+              <a:rPr lang="en-US"/>
               <a:t>Fifth level</a:t>
             </a:r>
-            <a:endParaRPr lang="en-US"/>
           </a:p>
         </p:txBody>
       </p:sp>
@@ -1665,7 +1667,7 @@
           <a:p>
             <a:pPr lvl="0"/>
             <a:r>
-              <a:rPr lang="en-US" smtClean="0"/>
+              <a:rPr lang="en-US"/>
               <a:t>Click to edit Master text styles</a:t>
             </a:r>
           </a:p>
@@ -1721,38 +1723,37 @@
           <a:p>
             <a:pPr lvl="0"/>
             <a:r>
-              <a:rPr lang="en-US" smtClean="0"/>
+              <a:rPr lang="en-US"/>
               <a:t>Click to edit Master text styles</a:t>
             </a:r>
           </a:p>
           <a:p>
             <a:pPr lvl="1"/>
             <a:r>
-              <a:rPr lang="en-US" smtClean="0"/>
+              <a:rPr lang="en-US"/>
               <a:t>Second level</a:t>
             </a:r>
           </a:p>
           <a:p>
             <a:pPr lvl="2"/>
             <a:r>
-              <a:rPr lang="en-US" smtClean="0"/>
+              <a:rPr lang="en-US"/>
               <a:t>Third level</a:t>
             </a:r>
           </a:p>
           <a:p>
             <a:pPr lvl="3"/>
             <a:r>
-              <a:rPr lang="en-US" smtClean="0"/>
+              <a:rPr lang="en-US"/>
               <a:t>Fourth level</a:t>
             </a:r>
           </a:p>
           <a:p>
             <a:pPr lvl="4"/>
             <a:r>
-              <a:rPr lang="en-US" smtClean="0"/>
+              <a:rPr lang="en-US"/>
               <a:t>Fifth level</a:t>
             </a:r>
-            <a:endParaRPr lang="en-US"/>
           </a:p>
         </p:txBody>
       </p:sp>
@@ -1773,7 +1774,7 @@
           <a:p>
             <a:fld id="{5BCAD085-E8A6-8845-BD4E-CB4CCA059FC4}" type="datetimeFigureOut">
               <a:rPr lang="en-US" smtClean="0"/>
-              <a:t>1/27/13</a:t>
+              <a:t>4/27/26</a:t>
             </a:fld>
             <a:endParaRPr lang="en-US"/>
           </a:p>
@@ -1867,10 +1868,9 @@
           <a:lstStyle/>
           <a:p>
             <a:r>
-              <a:rPr lang="en-US" smtClean="0"/>
+              <a:rPr lang="en-US"/>
               <a:t>Click to edit Master title style</a:t>
             </a:r>
-            <a:endParaRPr lang="en-US"/>
           </a:p>
         </p:txBody>
       </p:sp>
@@ -1891,7 +1891,7 @@
           <a:p>
             <a:fld id="{5BCAD085-E8A6-8845-BD4E-CB4CCA059FC4}" type="datetimeFigureOut">
               <a:rPr lang="en-US" smtClean="0"/>
-              <a:t>1/27/13</a:t>
+              <a:t>4/27/26</a:t>
             </a:fld>
             <a:endParaRPr lang="en-US"/>
           </a:p>
@@ -1986,7 +1986,7 @@
           <a:p>
             <a:fld id="{5BCAD085-E8A6-8845-BD4E-CB4CCA059FC4}" type="datetimeFigureOut">
               <a:rPr lang="en-US" smtClean="0"/>
-              <a:t>1/27/13</a:t>
+              <a:t>4/27/26</a:t>
             </a:fld>
             <a:endParaRPr lang="en-US"/>
           </a:p>
@@ -2089,10 +2089,9 @@
           </a:lstStyle>
           <a:p>
             <a:r>
-              <a:rPr lang="en-US" smtClean="0"/>
+              <a:rPr lang="en-US"/>
               <a:t>Click to edit Master title style</a:t>
             </a:r>
-            <a:endParaRPr lang="en-US"/>
           </a:p>
         </p:txBody>
       </p:sp>
@@ -2146,38 +2145,37 @@
           <a:p>
             <a:pPr lvl="0"/>
             <a:r>
-              <a:rPr lang="en-US" smtClean="0"/>
+              <a:rPr lang="en-US"/>
               <a:t>Click to edit Master text styles</a:t>
             </a:r>
           </a:p>
           <a:p>
             <a:pPr lvl="1"/>
             <a:r>
-              <a:rPr lang="en-US" smtClean="0"/>
+              <a:rPr lang="en-US"/>
               <a:t>Second level</a:t>
             </a:r>
           </a:p>
           <a:p>
             <a:pPr lvl="2"/>
             <a:r>
-              <a:rPr lang="en-US" smtClean="0"/>
+              <a:rPr lang="en-US"/>
               <a:t>Third level</a:t>
             </a:r>
           </a:p>
           <a:p>
             <a:pPr lvl="3"/>
             <a:r>
-              <a:rPr lang="en-US" smtClean="0"/>
+              <a:rPr lang="en-US"/>
               <a:t>Fourth level</a:t>
             </a:r>
           </a:p>
           <a:p>
             <a:pPr lvl="4"/>
             <a:r>
-              <a:rPr lang="en-US" smtClean="0"/>
+              <a:rPr lang="en-US"/>
               <a:t>Fifth level</a:t>
             </a:r>
-            <a:endParaRPr lang="en-US"/>
           </a:p>
         </p:txBody>
       </p:sp>
@@ -2240,7 +2238,7 @@
           <a:p>
             <a:pPr lvl="0"/>
             <a:r>
-              <a:rPr lang="en-US" smtClean="0"/>
+              <a:rPr lang="en-US"/>
               <a:t>Click to edit Master text styles</a:t>
             </a:r>
           </a:p>
@@ -2263,7 +2261,7 @@
           <a:p>
             <a:fld id="{5BCAD085-E8A6-8845-BD4E-CB4CCA059FC4}" type="datetimeFigureOut">
               <a:rPr lang="en-US" smtClean="0"/>
-              <a:t>1/27/13</a:t>
+              <a:t>4/27/26</a:t>
             </a:fld>
             <a:endParaRPr lang="en-US"/>
           </a:p>
@@ -2366,10 +2364,9 @@
           </a:lstStyle>
           <a:p>
             <a:r>
-              <a:rPr lang="en-US" smtClean="0"/>
+              <a:rPr lang="en-US"/>
               <a:t>Click to edit Master title style</a:t>
             </a:r>
-            <a:endParaRPr lang="en-US"/>
           </a:p>
         </p:txBody>
       </p:sp>
@@ -2493,7 +2490,7 @@
           <a:p>
             <a:pPr lvl="0"/>
             <a:r>
-              <a:rPr lang="en-US" smtClean="0"/>
+              <a:rPr lang="en-US"/>
               <a:t>Click to edit Master text styles</a:t>
             </a:r>
           </a:p>
@@ -2516,7 +2513,7 @@
           <a:p>
             <a:fld id="{5BCAD085-E8A6-8845-BD4E-CB4CCA059FC4}" type="datetimeFigureOut">
               <a:rPr lang="en-US" smtClean="0"/>
-              <a:t>1/27/13</a:t>
+              <a:t>4/27/26</a:t>
             </a:fld>
             <a:endParaRPr lang="en-US"/>
           </a:p>
@@ -2625,10 +2622,9 @@
           <a:lstStyle/>
           <a:p>
             <a:r>
-              <a:rPr lang="en-US" smtClean="0"/>
+              <a:rPr lang="en-US"/>
               <a:t>Click to edit Master title style</a:t>
             </a:r>
-            <a:endParaRPr lang="en-US"/>
           </a:p>
         </p:txBody>
       </p:sp>
@@ -2659,38 +2655,37 @@
           <a:p>
             <a:pPr lvl="0"/>
             <a:r>
-              <a:rPr lang="en-US" smtClean="0"/>
+              <a:rPr lang="en-US"/>
               <a:t>Click to edit Master text styles</a:t>
             </a:r>
           </a:p>
           <a:p>
             <a:pPr lvl="1"/>
             <a:r>
-              <a:rPr lang="en-US" smtClean="0"/>
+              <a:rPr lang="en-US"/>
               <a:t>Second level</a:t>
             </a:r>
           </a:p>
           <a:p>
             <a:pPr lvl="2"/>
             <a:r>
-              <a:rPr lang="en-US" smtClean="0"/>
+              <a:rPr lang="en-US"/>
               <a:t>Third level</a:t>
             </a:r>
           </a:p>
           <a:p>
             <a:pPr lvl="3"/>
             <a:r>
-              <a:rPr lang="en-US" smtClean="0"/>
+              <a:rPr lang="en-US"/>
               <a:t>Fourth level</a:t>
             </a:r>
           </a:p>
           <a:p>
             <a:pPr lvl="4"/>
             <a:r>
-              <a:rPr lang="en-US" smtClean="0"/>
+              <a:rPr lang="en-US"/>
               <a:t>Fifth level</a:t>
             </a:r>
-            <a:endParaRPr lang="en-US"/>
           </a:p>
         </p:txBody>
       </p:sp>
@@ -2729,7 +2724,7 @@
           <a:p>
             <a:fld id="{5BCAD085-E8A6-8845-BD4E-CB4CCA059FC4}" type="datetimeFigureOut">
               <a:rPr lang="en-US" smtClean="0"/>
-              <a:t>1/27/13</a:t>
+              <a:t>4/27/26</a:t>
             </a:fld>
             <a:endParaRPr lang="en-US"/>
           </a:p>
@@ -3088,7 +3083,7 @@
 </file>
 
 <file path=ppt/slides/slide1.xml><?xml version="1.0" encoding="utf-8"?>
-<p:sld xmlns:a="http://schemas.openxmlformats.org/drawingml/2006/main" xmlns:p="http://schemas.openxmlformats.org/presentationml/2006/main" xmlns:r="http://schemas.openxmlformats.org/officeDocument/2006/relationships">
+<p:sld xmlns:a="http://schemas.openxmlformats.org/drawingml/2006/main" xmlns:r="http://schemas.openxmlformats.org/officeDocument/2006/relationships" xmlns:p="http://schemas.openxmlformats.org/presentationml/2006/main">
   <p:cSld>
     <p:spTree>
       <p:nvGrpSpPr>
@@ -3096,7 +3091,14 @@
         <p:cNvGrpSpPr/>
         <p:nvPr/>
       </p:nvGrpSpPr>
-      <p:grpSpPr/>
+      <p:grpSpPr>
+        <a:xfrm>
+          <a:off x="0" y="0"/>
+          <a:ext cx="0" cy="0"/>
+          <a:chOff x="0" y="0"/>
+          <a:chExt cx="0" cy="0"/>
+        </a:xfrm>
+      </p:grpSpPr>
       <p:sp>
         <p:nvSpPr>
           <p:cNvPr id="2" name="Rectangle 1"/>
@@ -3105,7 +3107,7 @@
         </p:nvSpPr>
         <p:spPr>
           <a:xfrm>
-            <a:off x="0" y="0"/>
+            <a:off x="0" y="384048"/>
             <a:ext cx="12188952" cy="6858000"/>
           </a:xfrm>
           <a:prstGeom prst="rect">
@@ -3137,6 +3139,7 @@
           <a:lstStyle/>
           <a:p>
             <a:pPr algn="ctr"/>
+            <a:endParaRPr/>
           </a:p>
         </p:txBody>
       </p:sp>
@@ -3180,6 +3183,7 @@
           <a:lstStyle/>
           <a:p>
             <a:pPr algn="ctr"/>
+            <a:endParaRPr/>
           </a:p>
         </p:txBody>
       </p:sp>
@@ -3223,6 +3227,7 @@
           <a:lstStyle/>
           <a:p>
             <a:pPr algn="ctr"/>
+            <a:endParaRPr/>
           </a:p>
         </p:txBody>
       </p:sp>
@@ -3266,6 +3271,7 @@
           <a:lstStyle/>
           <a:p>
             <a:pPr algn="ctr"/>
+            <a:endParaRPr/>
           </a:p>
         </p:txBody>
       </p:sp>
@@ -3309,6 +3315,7 @@
           <a:lstStyle/>
           <a:p>
             <a:pPr algn="ctr"/>
+            <a:endParaRPr/>
           </a:p>
         </p:txBody>
       </p:sp>
@@ -3352,6 +3359,7 @@
           <a:lstStyle/>
           <a:p>
             <a:pPr algn="ctr"/>
+            <a:endParaRPr/>
           </a:p>
         </p:txBody>
       </p:sp>
@@ -3395,6 +3403,7 @@
           <a:lstStyle/>
           <a:p>
             <a:pPr algn="ctr"/>
+            <a:endParaRPr/>
           </a:p>
         </p:txBody>
       </p:sp>
@@ -3438,6 +3447,7 @@
           <a:lstStyle/>
           <a:p>
             <a:pPr algn="ctr"/>
+            <a:endParaRPr/>
           </a:p>
         </p:txBody>
       </p:sp>
@@ -3481,6 +3491,7 @@
           <a:lstStyle/>
           <a:p>
             <a:pPr algn="ctr"/>
+            <a:endParaRPr/>
           </a:p>
         </p:txBody>
       </p:sp>
@@ -3527,7 +3538,7 @@
         </p:nvSpPr>
         <p:spPr>
           <a:xfrm>
-            <a:off x="274320" y="2103120"/>
+            <a:off x="274319" y="1559052"/>
             <a:ext cx="4480560" cy="777240"/>
           </a:xfrm>
           <a:prstGeom prst="rect">
@@ -3769,6 +3780,7 @@
           <a:lstStyle/>
           <a:p>
             <a:pPr algn="ctr"/>
+            <a:endParaRPr/>
           </a:p>
         </p:txBody>
       </p:sp>
@@ -3796,13 +3808,31 @@
           <a:p>
             <a:pPr algn="l"/>
             <a:r>
-              <a:rPr sz="1300" b="0">
+              <a:rPr sz="1300" b="0" dirty="0">
                 <a:solidFill>
                   <a:srgbClr val="4A4A5A"/>
                 </a:solidFill>
                 <a:latin typeface="Calibri"/>
               </a:rPr>
-              <a:t>This presentation applies eye-tracking principles to predict how users visually interact with CollabX screens — identifying attention failures and proposing data-driven design improvements.</a:t>
+              <a:t>This presentation applies eye-tracking principles to predict how users visually interact with </a:t>
+            </a:r>
+            <a:r>
+              <a:rPr sz="1300" b="0" dirty="0" err="1">
+                <a:solidFill>
+                  <a:srgbClr val="4A4A5A"/>
+                </a:solidFill>
+                <a:latin typeface="Calibri"/>
+              </a:rPr>
+              <a:t>CollabX</a:t>
+            </a:r>
+            <a:r>
+              <a:rPr sz="1300" b="0" dirty="0">
+                <a:solidFill>
+                  <a:srgbClr val="4A4A5A"/>
+                </a:solidFill>
+                <a:latin typeface="Calibri"/>
+              </a:rPr>
+              <a:t> screens — identifying attention failures and proposing data-driven design improvements.</a:t>
             </a:r>
           </a:p>
         </p:txBody>
@@ -3847,6 +3877,7 @@
           <a:lstStyle/>
           <a:p>
             <a:pPr algn="ctr"/>
+            <a:endParaRPr/>
           </a:p>
         </p:txBody>
       </p:sp>
@@ -3925,6 +3956,7 @@
           <a:lstStyle/>
           <a:p>
             <a:pPr algn="ctr"/>
+            <a:endParaRPr/>
           </a:p>
         </p:txBody>
       </p:sp>
@@ -4003,6 +4035,7 @@
           <a:lstStyle/>
           <a:p>
             <a:pPr algn="ctr"/>
+            <a:endParaRPr/>
           </a:p>
         </p:txBody>
       </p:sp>
@@ -4081,6 +4114,7 @@
           <a:lstStyle/>
           <a:p>
             <a:pPr algn="ctr"/>
+            <a:endParaRPr/>
           </a:p>
         </p:txBody>
       </p:sp>
@@ -4163,7 +4197,7 @@
 </file>
 
 <file path=ppt/slides/slide10.xml><?xml version="1.0" encoding="utf-8"?>
-<p:sld xmlns:a="http://schemas.openxmlformats.org/drawingml/2006/main" xmlns:p="http://schemas.openxmlformats.org/presentationml/2006/main" xmlns:r="http://schemas.openxmlformats.org/officeDocument/2006/relationships">
+<p:sld xmlns:a="http://schemas.openxmlformats.org/drawingml/2006/main" xmlns:r="http://schemas.openxmlformats.org/officeDocument/2006/relationships" xmlns:p="http://schemas.openxmlformats.org/presentationml/2006/main">
   <p:cSld>
     <p:spTree>
       <p:nvGrpSpPr>
@@ -4171,7 +4205,14 @@
         <p:cNvGrpSpPr/>
         <p:nvPr/>
       </p:nvGrpSpPr>
-      <p:grpSpPr/>
+      <p:grpSpPr>
+        <a:xfrm>
+          <a:off x="0" y="0"/>
+          <a:ext cx="0" cy="0"/>
+          <a:chOff x="0" y="0"/>
+          <a:chExt cx="0" cy="0"/>
+        </a:xfrm>
+      </p:grpSpPr>
       <p:sp>
         <p:nvSpPr>
           <p:cNvPr id="2" name="Rectangle 1"/>
@@ -4212,6 +4253,7 @@
           <a:lstStyle/>
           <a:p>
             <a:pPr algn="ctr"/>
+            <a:endParaRPr/>
           </a:p>
         </p:txBody>
       </p:sp>
@@ -4255,6 +4297,7 @@
           <a:lstStyle/>
           <a:p>
             <a:pPr algn="ctr"/>
+            <a:endParaRPr/>
           </a:p>
         </p:txBody>
       </p:sp>
@@ -4298,6 +4341,7 @@
           <a:lstStyle/>
           <a:p>
             <a:pPr algn="ctr"/>
+            <a:endParaRPr/>
           </a:p>
         </p:txBody>
       </p:sp>
@@ -4341,6 +4385,7 @@
           <a:lstStyle/>
           <a:p>
             <a:pPr algn="ctr"/>
+            <a:endParaRPr/>
           </a:p>
         </p:txBody>
       </p:sp>
@@ -4525,6 +4570,7 @@
           <a:lstStyle/>
           <a:p>
             <a:pPr algn="ctr"/>
+            <a:endParaRPr/>
           </a:p>
         </p:txBody>
       </p:sp>
@@ -4552,7 +4598,7 @@
           <a:p>
             <a:pPr algn="ctr"/>
             <a:r>
-              <a:rPr sz="3000" b="1">
+              <a:rPr sz="3000" b="1" dirty="0">
                 <a:solidFill>
                   <a:srgbClr val="FFFFFF"/>
                 </a:solidFill>
@@ -4638,6 +4684,7 @@
           <a:lstStyle/>
           <a:p>
             <a:pPr algn="ctr"/>
+            <a:endParaRPr/>
           </a:p>
         </p:txBody>
       </p:sp>
@@ -4751,6 +4798,7 @@
           <a:lstStyle/>
           <a:p>
             <a:pPr algn="ctr"/>
+            <a:endParaRPr/>
           </a:p>
         </p:txBody>
       </p:sp>
@@ -4864,6 +4912,7 @@
           <a:lstStyle/>
           <a:p>
             <a:pPr algn="ctr"/>
+            <a:endParaRPr/>
           </a:p>
         </p:txBody>
       </p:sp>
@@ -4977,6 +5026,7 @@
           <a:lstStyle/>
           <a:p>
             <a:pPr algn="ctr"/>
+            <a:endParaRPr/>
           </a:p>
         </p:txBody>
       </p:sp>
@@ -5055,6 +5105,7 @@
           <a:lstStyle/>
           <a:p>
             <a:pPr algn="ctr"/>
+            <a:endParaRPr/>
           </a:p>
         </p:txBody>
       </p:sp>
@@ -5133,6 +5184,7 @@
           <a:lstStyle/>
           <a:p>
             <a:pPr algn="ctr"/>
+            <a:endParaRPr/>
           </a:p>
         </p:txBody>
       </p:sp>
@@ -5211,6 +5263,7 @@
           <a:lstStyle/>
           <a:p>
             <a:pPr algn="ctr"/>
+            <a:endParaRPr/>
           </a:p>
         </p:txBody>
       </p:sp>
@@ -5289,6 +5342,7 @@
           <a:lstStyle/>
           <a:p>
             <a:pPr algn="ctr"/>
+            <a:endParaRPr/>
           </a:p>
         </p:txBody>
       </p:sp>
@@ -5367,6 +5421,7 @@
           <a:lstStyle/>
           <a:p>
             <a:pPr algn="ctr"/>
+            <a:endParaRPr/>
           </a:p>
         </p:txBody>
       </p:sp>
@@ -5445,6 +5500,7 @@
           <a:lstStyle/>
           <a:p>
             <a:pPr algn="ctr"/>
+            <a:endParaRPr/>
           </a:p>
         </p:txBody>
       </p:sp>
@@ -5523,6 +5579,7 @@
           <a:lstStyle/>
           <a:p>
             <a:pPr algn="ctr"/>
+            <a:endParaRPr/>
           </a:p>
         </p:txBody>
       </p:sp>
@@ -5570,7 +5627,7 @@
 </file>
 
 <file path=ppt/slides/slide2.xml><?xml version="1.0" encoding="utf-8"?>
-<p:sld xmlns:a="http://schemas.openxmlformats.org/drawingml/2006/main" xmlns:p="http://schemas.openxmlformats.org/presentationml/2006/main" xmlns:r="http://schemas.openxmlformats.org/officeDocument/2006/relationships">
+<p:sld xmlns:a="http://schemas.openxmlformats.org/drawingml/2006/main" xmlns:r="http://schemas.openxmlformats.org/officeDocument/2006/relationships" xmlns:p="http://schemas.openxmlformats.org/presentationml/2006/main">
   <p:cSld>
     <p:spTree>
       <p:nvGrpSpPr>
@@ -5578,7 +5635,14 @@
         <p:cNvGrpSpPr/>
         <p:nvPr/>
       </p:nvGrpSpPr>
-      <p:grpSpPr/>
+      <p:grpSpPr>
+        <a:xfrm>
+          <a:off x="0" y="0"/>
+          <a:ext cx="0" cy="0"/>
+          <a:chOff x="0" y="0"/>
+          <a:chExt cx="0" cy="0"/>
+        </a:xfrm>
+      </p:grpSpPr>
       <p:sp>
         <p:nvSpPr>
           <p:cNvPr id="2" name="Rectangle 1"/>
@@ -5619,6 +5683,7 @@
           <a:lstStyle/>
           <a:p>
             <a:pPr algn="ctr"/>
+            <a:endParaRPr/>
           </a:p>
         </p:txBody>
       </p:sp>
@@ -5662,6 +5727,7 @@
           <a:lstStyle/>
           <a:p>
             <a:pPr algn="ctr"/>
+            <a:endParaRPr/>
           </a:p>
         </p:txBody>
       </p:sp>
@@ -5742,6 +5808,7 @@
           <a:lstStyle/>
           <a:p>
             <a:pPr algn="ctr"/>
+            <a:endParaRPr/>
           </a:p>
         </p:txBody>
       </p:sp>
@@ -5785,6 +5852,7 @@
           <a:lstStyle/>
           <a:p>
             <a:pPr algn="ctr"/>
+            <a:endParaRPr/>
           </a:p>
         </p:txBody>
       </p:sp>
@@ -5935,6 +6003,7 @@
           <a:lstStyle/>
           <a:p>
             <a:pPr algn="ctr"/>
+            <a:endParaRPr/>
           </a:p>
         </p:txBody>
       </p:sp>
@@ -5978,6 +6047,7 @@
           <a:lstStyle/>
           <a:p>
             <a:pPr algn="ctr"/>
+            <a:endParaRPr/>
           </a:p>
         </p:txBody>
       </p:sp>
@@ -6128,6 +6198,7 @@
           <a:lstStyle/>
           <a:p>
             <a:pPr algn="ctr"/>
+            <a:endParaRPr/>
           </a:p>
         </p:txBody>
       </p:sp>
@@ -6171,6 +6242,7 @@
           <a:lstStyle/>
           <a:p>
             <a:pPr algn="ctr"/>
+            <a:endParaRPr/>
           </a:p>
         </p:txBody>
       </p:sp>
@@ -6321,6 +6393,7 @@
           <a:lstStyle/>
           <a:p>
             <a:pPr algn="ctr"/>
+            <a:endParaRPr/>
           </a:p>
         </p:txBody>
       </p:sp>
@@ -6364,41 +6437,7 @@
           <a:lstStyle/>
           <a:p>
             <a:pPr algn="ctr"/>
-          </a:p>
-        </p:txBody>
-      </p:sp>
-      <p:sp>
-        <p:nvSpPr>
-          <p:cNvPr id="22" name="TextBox 21"/>
-          <p:cNvSpPr txBox="1"/>
-          <p:nvPr/>
-        </p:nvSpPr>
-        <p:spPr>
-          <a:xfrm>
-            <a:off x="8183880" y="1207008"/>
-            <a:ext cx="685800" cy="548640"/>
-          </a:xfrm>
-          <a:prstGeom prst="rect">
-            <a:avLst/>
-          </a:prstGeom>
-          <a:noFill/>
-        </p:spPr>
-        <p:txBody>
-          <a:bodyPr wrap="square">
-            <a:spAutoFit/>
-          </a:bodyPr>
-          <a:lstStyle/>
-          <a:p>
-            <a:pPr algn="ctr"/>
-            <a:r>
-              <a:rPr sz="2200" b="1">
-                <a:solidFill>
-                  <a:srgbClr val="FFFFFF"/>
-                </a:solidFill>
-                <a:latin typeface="Calibri"/>
-              </a:rPr>
-              <a:t>🔥</a:t>
-            </a:r>
+            <a:endParaRPr/>
           </a:p>
         </p:txBody>
       </p:sp>
@@ -6514,6 +6553,7 @@
           <a:lstStyle/>
           <a:p>
             <a:pPr algn="ctr"/>
+            <a:endParaRPr/>
           </a:p>
         </p:txBody>
       </p:sp>
@@ -6557,6 +6597,7 @@
           <a:lstStyle/>
           <a:p>
             <a:pPr algn="ctr"/>
+            <a:endParaRPr/>
           </a:p>
         </p:txBody>
       </p:sp>
@@ -6707,6 +6748,7 @@
           <a:lstStyle/>
           <a:p>
             <a:pPr algn="ctr"/>
+            <a:endParaRPr/>
           </a:p>
         </p:txBody>
       </p:sp>
@@ -6750,6 +6792,7 @@
           <a:lstStyle/>
           <a:p>
             <a:pPr algn="ctr"/>
+            <a:endParaRPr/>
           </a:p>
         </p:txBody>
       </p:sp>
@@ -6828,6 +6871,7 @@
           <a:lstStyle/>
           <a:p>
             <a:pPr algn="ctr"/>
+            <a:endParaRPr/>
           </a:p>
         </p:txBody>
       </p:sp>
@@ -6906,6 +6950,7 @@
           <a:lstStyle/>
           <a:p>
             <a:pPr algn="ctr"/>
+            <a:endParaRPr/>
           </a:p>
         </p:txBody>
       </p:sp>
@@ -6984,6 +7029,7 @@
           <a:lstStyle/>
           <a:p>
             <a:pPr algn="ctr"/>
+            <a:endParaRPr/>
           </a:p>
         </p:txBody>
       </p:sp>
@@ -7031,7 +7077,7 @@
 </file>
 
 <file path=ppt/slides/slide3.xml><?xml version="1.0" encoding="utf-8"?>
-<p:sld xmlns:a="http://schemas.openxmlformats.org/drawingml/2006/main" xmlns:p="http://schemas.openxmlformats.org/presentationml/2006/main" xmlns:r="http://schemas.openxmlformats.org/officeDocument/2006/relationships">
+<p:sld xmlns:a="http://schemas.openxmlformats.org/drawingml/2006/main" xmlns:r="http://schemas.openxmlformats.org/officeDocument/2006/relationships" xmlns:p="http://schemas.openxmlformats.org/presentationml/2006/main">
   <p:cSld>
     <p:spTree>
       <p:nvGrpSpPr>
@@ -7039,7 +7085,14 @@
         <p:cNvGrpSpPr/>
         <p:nvPr/>
       </p:nvGrpSpPr>
-      <p:grpSpPr/>
+      <p:grpSpPr>
+        <a:xfrm>
+          <a:off x="0" y="0"/>
+          <a:ext cx="0" cy="0"/>
+          <a:chOff x="0" y="0"/>
+          <a:chExt cx="0" cy="0"/>
+        </a:xfrm>
+      </p:grpSpPr>
       <p:sp>
         <p:nvSpPr>
           <p:cNvPr id="2" name="Rectangle 1"/>
@@ -7080,6 +7133,7 @@
           <a:lstStyle/>
           <a:p>
             <a:pPr algn="ctr"/>
+            <a:endParaRPr/>
           </a:p>
         </p:txBody>
       </p:sp>
@@ -7123,6 +7177,7 @@
           <a:lstStyle/>
           <a:p>
             <a:pPr algn="ctr"/>
+            <a:endParaRPr/>
           </a:p>
         </p:txBody>
       </p:sp>
@@ -7203,6 +7258,7 @@
           <a:lstStyle/>
           <a:p>
             <a:pPr algn="ctr"/>
+            <a:endParaRPr/>
           </a:p>
         </p:txBody>
       </p:sp>
@@ -7246,6 +7302,7 @@
           <a:lstStyle/>
           <a:p>
             <a:pPr algn="ctr"/>
+            <a:endParaRPr/>
           </a:p>
         </p:txBody>
       </p:sp>
@@ -7324,6 +7381,7 @@
           <a:lstStyle/>
           <a:p>
             <a:pPr algn="ctr"/>
+            <a:endParaRPr/>
           </a:p>
         </p:txBody>
       </p:sp>
@@ -7509,6 +7567,7 @@
           <a:lstStyle/>
           <a:p>
             <a:pPr algn="ctr"/>
+            <a:endParaRPr/>
           </a:p>
         </p:txBody>
       </p:sp>
@@ -7552,6 +7611,7 @@
           <a:lstStyle/>
           <a:p>
             <a:pPr algn="ctr"/>
+            <a:endParaRPr/>
           </a:p>
         </p:txBody>
       </p:sp>
@@ -7630,6 +7690,7 @@
           <a:lstStyle/>
           <a:p>
             <a:pPr algn="ctr"/>
+            <a:endParaRPr/>
           </a:p>
         </p:txBody>
       </p:sp>
@@ -7815,6 +7876,7 @@
           <a:lstStyle/>
           <a:p>
             <a:pPr algn="ctr"/>
+            <a:endParaRPr/>
           </a:p>
         </p:txBody>
       </p:sp>
@@ -7858,6 +7920,7 @@
           <a:lstStyle/>
           <a:p>
             <a:pPr algn="ctr"/>
+            <a:endParaRPr/>
           </a:p>
         </p:txBody>
       </p:sp>
@@ -7936,6 +7999,7 @@
           <a:lstStyle/>
           <a:p>
             <a:pPr algn="ctr"/>
+            <a:endParaRPr/>
           </a:p>
         </p:txBody>
       </p:sp>
@@ -8123,7 +8187,7 @@
 </file>
 
 <file path=ppt/slides/slide4.xml><?xml version="1.0" encoding="utf-8"?>
-<p:sld xmlns:a="http://schemas.openxmlformats.org/drawingml/2006/main" xmlns:p="http://schemas.openxmlformats.org/presentationml/2006/main" xmlns:r="http://schemas.openxmlformats.org/officeDocument/2006/relationships">
+<p:sld xmlns:a="http://schemas.openxmlformats.org/drawingml/2006/main" xmlns:r="http://schemas.openxmlformats.org/officeDocument/2006/relationships" xmlns:p="http://schemas.openxmlformats.org/presentationml/2006/main">
   <p:cSld>
     <p:spTree>
       <p:nvGrpSpPr>
@@ -8131,7 +8195,14 @@
         <p:cNvGrpSpPr/>
         <p:nvPr/>
       </p:nvGrpSpPr>
-      <p:grpSpPr/>
+      <p:grpSpPr>
+        <a:xfrm>
+          <a:off x="0" y="0"/>
+          <a:ext cx="0" cy="0"/>
+          <a:chOff x="0" y="0"/>
+          <a:chExt cx="0" cy="0"/>
+        </a:xfrm>
+      </p:grpSpPr>
       <p:sp>
         <p:nvSpPr>
           <p:cNvPr id="2" name="Rectangle 1"/>
@@ -8172,6 +8243,7 @@
           <a:lstStyle/>
           <a:p>
             <a:pPr algn="ctr"/>
+            <a:endParaRPr/>
           </a:p>
         </p:txBody>
       </p:sp>
@@ -8215,6 +8287,7 @@
           <a:lstStyle/>
           <a:p>
             <a:pPr algn="ctr"/>
+            <a:endParaRPr/>
           </a:p>
         </p:txBody>
       </p:sp>
@@ -8330,6 +8403,7 @@
           <a:lstStyle/>
           <a:p>
             <a:pPr algn="ctr"/>
+            <a:endParaRPr/>
           </a:p>
         </p:txBody>
       </p:sp>
@@ -8408,6 +8482,7 @@
           <a:lstStyle/>
           <a:p>
             <a:pPr algn="ctr"/>
+            <a:endParaRPr/>
           </a:p>
         </p:txBody>
       </p:sp>
@@ -8451,6 +8526,7 @@
           <a:lstStyle/>
           <a:p>
             <a:pPr algn="ctr"/>
+            <a:endParaRPr/>
           </a:p>
         </p:txBody>
       </p:sp>
@@ -8529,6 +8605,7 @@
           <a:lstStyle/>
           <a:p>
             <a:pPr algn="ctr"/>
+            <a:endParaRPr/>
           </a:p>
         </p:txBody>
       </p:sp>
@@ -8607,6 +8684,7 @@
           <a:lstStyle/>
           <a:p>
             <a:pPr algn="ctr"/>
+            <a:endParaRPr/>
           </a:p>
         </p:txBody>
       </p:sp>
@@ -8685,6 +8763,7 @@
           <a:lstStyle/>
           <a:p>
             <a:pPr algn="ctr"/>
+            <a:endParaRPr/>
           </a:p>
         </p:txBody>
       </p:sp>
@@ -8763,6 +8842,7 @@
           <a:lstStyle/>
           <a:p>
             <a:pPr algn="ctr"/>
+            <a:endParaRPr/>
           </a:p>
         </p:txBody>
       </p:sp>
@@ -8843,6 +8923,7 @@
           <a:lstStyle/>
           <a:p>
             <a:pPr algn="ctr"/>
+            <a:endParaRPr/>
           </a:p>
         </p:txBody>
       </p:sp>
@@ -8956,6 +9037,7 @@
           <a:lstStyle/>
           <a:p>
             <a:pPr algn="ctr"/>
+            <a:endParaRPr/>
           </a:p>
         </p:txBody>
       </p:sp>
@@ -9034,6 +9116,7 @@
           <a:lstStyle/>
           <a:p>
             <a:pPr algn="ctr"/>
+            <a:endParaRPr/>
           </a:p>
         </p:txBody>
       </p:sp>
@@ -9112,6 +9195,7 @@
           <a:lstStyle/>
           <a:p>
             <a:pPr algn="ctr"/>
+            <a:endParaRPr/>
           </a:p>
         </p:txBody>
       </p:sp>
@@ -9190,6 +9274,7 @@
           <a:lstStyle/>
           <a:p>
             <a:pPr algn="ctr"/>
+            <a:endParaRPr/>
           </a:p>
         </p:txBody>
       </p:sp>
@@ -9268,6 +9353,7 @@
           <a:lstStyle/>
           <a:p>
             <a:pPr algn="ctr"/>
+            <a:endParaRPr/>
           </a:p>
         </p:txBody>
       </p:sp>
@@ -9346,6 +9432,7 @@
           <a:lstStyle/>
           <a:p>
             <a:pPr algn="ctr"/>
+            <a:endParaRPr/>
           </a:p>
         </p:txBody>
       </p:sp>
@@ -9424,6 +9511,7 @@
           <a:lstStyle/>
           <a:p>
             <a:pPr algn="ctr"/>
+            <a:endParaRPr/>
           </a:p>
         </p:txBody>
       </p:sp>
@@ -9504,6 +9592,7 @@
           <a:lstStyle/>
           <a:p>
             <a:pPr algn="ctr"/>
+            <a:endParaRPr/>
           </a:p>
         </p:txBody>
       </p:sp>
@@ -9582,6 +9671,7 @@
           <a:lstStyle/>
           <a:p>
             <a:pPr algn="ctr"/>
+            <a:endParaRPr/>
           </a:p>
         </p:txBody>
       </p:sp>
@@ -9662,6 +9752,7 @@
           <a:lstStyle/>
           <a:p>
             <a:pPr algn="ctr"/>
+            <a:endParaRPr/>
           </a:p>
         </p:txBody>
       </p:sp>
@@ -9740,6 +9831,7 @@
           <a:lstStyle/>
           <a:p>
             <a:pPr algn="ctr"/>
+            <a:endParaRPr/>
           </a:p>
         </p:txBody>
       </p:sp>
@@ -9783,6 +9875,7 @@
           <a:lstStyle/>
           <a:p>
             <a:pPr algn="ctr"/>
+            <a:endParaRPr/>
           </a:p>
         </p:txBody>
       </p:sp>
@@ -9826,6 +9919,7 @@
           <a:lstStyle/>
           <a:p>
             <a:pPr algn="ctr"/>
+            <a:endParaRPr/>
           </a:p>
         </p:txBody>
       </p:sp>
@@ -9869,6 +9963,7 @@
           <a:lstStyle/>
           <a:p>
             <a:pPr algn="ctr"/>
+            <a:endParaRPr/>
           </a:p>
         </p:txBody>
       </p:sp>
@@ -9912,6 +10007,7 @@
           <a:lstStyle/>
           <a:p>
             <a:pPr algn="ctr"/>
+            <a:endParaRPr/>
           </a:p>
         </p:txBody>
       </p:sp>
@@ -9955,6 +10051,7 @@
           <a:lstStyle/>
           <a:p>
             <a:pPr algn="ctr"/>
+            <a:endParaRPr/>
           </a:p>
         </p:txBody>
       </p:sp>
@@ -9998,6 +10095,7 @@
           <a:lstStyle/>
           <a:p>
             <a:pPr algn="ctr"/>
+            <a:endParaRPr/>
           </a:p>
         </p:txBody>
       </p:sp>
@@ -10078,6 +10176,7 @@
           <a:lstStyle/>
           <a:p>
             <a:pPr algn="ctr"/>
+            <a:endParaRPr/>
           </a:p>
         </p:txBody>
       </p:sp>
@@ -10121,6 +10220,7 @@
           <a:lstStyle/>
           <a:p>
             <a:pPr algn="ctr"/>
+            <a:endParaRPr/>
           </a:p>
         </p:txBody>
       </p:sp>
@@ -10236,6 +10336,7 @@
           <a:lstStyle/>
           <a:p>
             <a:pPr algn="ctr"/>
+            <a:endParaRPr/>
           </a:p>
         </p:txBody>
       </p:sp>
@@ -10279,6 +10380,7 @@
           <a:lstStyle/>
           <a:p>
             <a:pPr algn="ctr"/>
+            <a:endParaRPr/>
           </a:p>
         </p:txBody>
       </p:sp>
@@ -10394,6 +10496,7 @@
           <a:lstStyle/>
           <a:p>
             <a:pPr algn="ctr"/>
+            <a:endParaRPr/>
           </a:p>
         </p:txBody>
       </p:sp>
@@ -10437,6 +10540,7 @@
           <a:lstStyle/>
           <a:p>
             <a:pPr algn="ctr"/>
+            <a:endParaRPr/>
           </a:p>
         </p:txBody>
       </p:sp>
@@ -10552,6 +10656,7 @@
           <a:lstStyle/>
           <a:p>
             <a:pPr algn="ctr"/>
+            <a:endParaRPr/>
           </a:p>
         </p:txBody>
       </p:sp>
@@ -10595,6 +10700,7 @@
           <a:lstStyle/>
           <a:p>
             <a:pPr algn="ctr"/>
+            <a:endParaRPr/>
           </a:p>
         </p:txBody>
       </p:sp>
@@ -10712,7 +10818,7 @@
 </file>
 
 <file path=ppt/slides/slide5.xml><?xml version="1.0" encoding="utf-8"?>
-<p:sld xmlns:a="http://schemas.openxmlformats.org/drawingml/2006/main" xmlns:p="http://schemas.openxmlformats.org/presentationml/2006/main" xmlns:r="http://schemas.openxmlformats.org/officeDocument/2006/relationships">
+<p:sld xmlns:a="http://schemas.openxmlformats.org/drawingml/2006/main" xmlns:r="http://schemas.openxmlformats.org/officeDocument/2006/relationships" xmlns:p="http://schemas.openxmlformats.org/presentationml/2006/main">
   <p:cSld>
     <p:spTree>
       <p:nvGrpSpPr>
@@ -10720,7 +10826,14 @@
         <p:cNvGrpSpPr/>
         <p:nvPr/>
       </p:nvGrpSpPr>
-      <p:grpSpPr/>
+      <p:grpSpPr>
+        <a:xfrm>
+          <a:off x="0" y="0"/>
+          <a:ext cx="0" cy="0"/>
+          <a:chOff x="0" y="0"/>
+          <a:chExt cx="0" cy="0"/>
+        </a:xfrm>
+      </p:grpSpPr>
       <p:sp>
         <p:nvSpPr>
           <p:cNvPr id="2" name="Rectangle 1"/>
@@ -10729,7 +10842,7 @@
         </p:nvSpPr>
         <p:spPr>
           <a:xfrm>
-            <a:off x="0" y="0"/>
+            <a:off x="-770382" y="0"/>
             <a:ext cx="12188952" cy="6858000"/>
           </a:xfrm>
           <a:prstGeom prst="rect">
@@ -10761,6 +10874,7 @@
           <a:lstStyle/>
           <a:p>
             <a:pPr algn="ctr"/>
+            <a:endParaRPr/>
           </a:p>
         </p:txBody>
       </p:sp>
@@ -10804,6 +10918,7 @@
           <a:lstStyle/>
           <a:p>
             <a:pPr algn="ctr"/>
+            <a:endParaRPr/>
           </a:p>
         </p:txBody>
       </p:sp>
@@ -10884,6 +10999,7 @@
           <a:lstStyle/>
           <a:p>
             <a:pPr algn="ctr"/>
+            <a:endParaRPr/>
           </a:p>
         </p:txBody>
       </p:sp>
@@ -10962,6 +11078,7 @@
           <a:lstStyle/>
           <a:p>
             <a:pPr algn="ctr"/>
+            <a:endParaRPr/>
           </a:p>
         </p:txBody>
       </p:sp>
@@ -11005,6 +11122,7 @@
           <a:lstStyle/>
           <a:p>
             <a:pPr algn="ctr"/>
+            <a:endParaRPr/>
           </a:p>
         </p:txBody>
       </p:sp>
@@ -11083,6 +11201,7 @@
           <a:lstStyle/>
           <a:p>
             <a:pPr algn="ctr"/>
+            <a:endParaRPr/>
           </a:p>
         </p:txBody>
       </p:sp>
@@ -11161,6 +11280,7 @@
           <a:lstStyle/>
           <a:p>
             <a:pPr algn="ctr"/>
+            <a:endParaRPr/>
           </a:p>
         </p:txBody>
       </p:sp>
@@ -11239,6 +11359,7 @@
           <a:lstStyle/>
           <a:p>
             <a:pPr algn="ctr"/>
+            <a:endParaRPr/>
           </a:p>
         </p:txBody>
       </p:sp>
@@ -11317,6 +11438,7 @@
           <a:lstStyle/>
           <a:p>
             <a:pPr algn="ctr"/>
+            <a:endParaRPr/>
           </a:p>
         </p:txBody>
       </p:sp>
@@ -11397,6 +11519,7 @@
           <a:lstStyle/>
           <a:p>
             <a:pPr algn="ctr"/>
+            <a:endParaRPr/>
           </a:p>
         </p:txBody>
       </p:sp>
@@ -11512,6 +11635,7 @@
           <a:lstStyle/>
           <a:p>
             <a:pPr algn="ctr"/>
+            <a:endParaRPr/>
           </a:p>
         </p:txBody>
       </p:sp>
@@ -11625,6 +11749,7 @@
           <a:lstStyle/>
           <a:p>
             <a:pPr algn="ctr"/>
+            <a:endParaRPr/>
           </a:p>
         </p:txBody>
       </p:sp>
@@ -11705,6 +11830,7 @@
           <a:lstStyle/>
           <a:p>
             <a:pPr algn="ctr"/>
+            <a:endParaRPr/>
           </a:p>
         </p:txBody>
       </p:sp>
@@ -11785,6 +11911,7 @@
           <a:lstStyle/>
           <a:p>
             <a:pPr algn="ctr"/>
+            <a:endParaRPr/>
           </a:p>
         </p:txBody>
       </p:sp>
@@ -11900,6 +12027,7 @@
           <a:lstStyle/>
           <a:p>
             <a:pPr algn="ctr"/>
+            <a:endParaRPr/>
           </a:p>
         </p:txBody>
       </p:sp>
@@ -12013,6 +12141,7 @@
           <a:lstStyle/>
           <a:p>
             <a:pPr algn="ctr"/>
+            <a:endParaRPr/>
           </a:p>
         </p:txBody>
       </p:sp>
@@ -12093,6 +12222,7 @@
           <a:lstStyle/>
           <a:p>
             <a:pPr algn="ctr"/>
+            <a:endParaRPr/>
           </a:p>
         </p:txBody>
       </p:sp>
@@ -12173,6 +12303,7 @@
           <a:lstStyle/>
           <a:p>
             <a:pPr algn="ctr"/>
+            <a:endParaRPr/>
           </a:p>
         </p:txBody>
       </p:sp>
@@ -12288,6 +12419,7 @@
           <a:lstStyle/>
           <a:p>
             <a:pPr algn="ctr"/>
+            <a:endParaRPr/>
           </a:p>
         </p:txBody>
       </p:sp>
@@ -12401,6 +12533,7 @@
           <a:lstStyle/>
           <a:p>
             <a:pPr algn="ctr"/>
+            <a:endParaRPr/>
           </a:p>
         </p:txBody>
       </p:sp>
@@ -12481,6 +12614,7 @@
           <a:lstStyle/>
           <a:p>
             <a:pPr algn="ctr"/>
+            <a:endParaRPr/>
           </a:p>
         </p:txBody>
       </p:sp>
@@ -12559,6 +12693,7 @@
           <a:lstStyle/>
           <a:p>
             <a:pPr algn="ctr"/>
+            <a:endParaRPr/>
           </a:p>
         </p:txBody>
       </p:sp>
@@ -12602,6 +12737,7 @@
           <a:lstStyle/>
           <a:p>
             <a:pPr algn="ctr"/>
+            <a:endParaRPr/>
           </a:p>
         </p:txBody>
       </p:sp>
@@ -12645,6 +12781,7 @@
           <a:lstStyle/>
           <a:p>
             <a:pPr algn="ctr"/>
+            <a:endParaRPr/>
           </a:p>
         </p:txBody>
       </p:sp>
@@ -12688,6 +12825,7 @@
           <a:lstStyle/>
           <a:p>
             <a:pPr algn="ctr"/>
+            <a:endParaRPr/>
           </a:p>
         </p:txBody>
       </p:sp>
@@ -12733,6 +12871,7 @@
           <a:lstStyle/>
           <a:p>
             <a:pPr algn="ctr"/>
+            <a:endParaRPr/>
           </a:p>
         </p:txBody>
       </p:sp>
@@ -12776,6 +12915,7 @@
           <a:lstStyle/>
           <a:p>
             <a:pPr algn="ctr"/>
+            <a:endParaRPr/>
           </a:p>
         </p:txBody>
       </p:sp>
@@ -12891,6 +13031,7 @@
           <a:lstStyle/>
           <a:p>
             <a:pPr algn="ctr"/>
+            <a:endParaRPr/>
           </a:p>
         </p:txBody>
       </p:sp>
@@ -12934,6 +13075,7 @@
           <a:lstStyle/>
           <a:p>
             <a:pPr algn="ctr"/>
+            <a:endParaRPr/>
           </a:p>
         </p:txBody>
       </p:sp>
@@ -13049,6 +13191,7 @@
           <a:lstStyle/>
           <a:p>
             <a:pPr algn="ctr"/>
+            <a:endParaRPr/>
           </a:p>
         </p:txBody>
       </p:sp>
@@ -13092,6 +13235,7 @@
           <a:lstStyle/>
           <a:p>
             <a:pPr algn="ctr"/>
+            <a:endParaRPr/>
           </a:p>
         </p:txBody>
       </p:sp>
@@ -13207,6 +13351,7 @@
           <a:lstStyle/>
           <a:p>
             <a:pPr algn="ctr"/>
+            <a:endParaRPr/>
           </a:p>
         </p:txBody>
       </p:sp>
@@ -13250,6 +13395,7 @@
           <a:lstStyle/>
           <a:p>
             <a:pPr algn="ctr"/>
+            <a:endParaRPr/>
           </a:p>
         </p:txBody>
       </p:sp>
@@ -13332,7 +13478,7 @@
 </file>
 
 <file path=ppt/slides/slide6.xml><?xml version="1.0" encoding="utf-8"?>
-<p:sld xmlns:a="http://schemas.openxmlformats.org/drawingml/2006/main" xmlns:p="http://schemas.openxmlformats.org/presentationml/2006/main" xmlns:r="http://schemas.openxmlformats.org/officeDocument/2006/relationships">
+<p:sld xmlns:a="http://schemas.openxmlformats.org/drawingml/2006/main" xmlns:r="http://schemas.openxmlformats.org/officeDocument/2006/relationships" xmlns:p="http://schemas.openxmlformats.org/presentationml/2006/main">
   <p:cSld>
     <p:spTree>
       <p:nvGrpSpPr>
@@ -13340,7 +13486,14 @@
         <p:cNvGrpSpPr/>
         <p:nvPr/>
       </p:nvGrpSpPr>
-      <p:grpSpPr/>
+      <p:grpSpPr>
+        <a:xfrm>
+          <a:off x="0" y="0"/>
+          <a:ext cx="0" cy="0"/>
+          <a:chOff x="0" y="0"/>
+          <a:chExt cx="0" cy="0"/>
+        </a:xfrm>
+      </p:grpSpPr>
       <p:sp>
         <p:nvSpPr>
           <p:cNvPr id="2" name="Rectangle 1"/>
@@ -13381,6 +13534,7 @@
           <a:lstStyle/>
           <a:p>
             <a:pPr algn="ctr"/>
+            <a:endParaRPr/>
           </a:p>
         </p:txBody>
       </p:sp>
@@ -13424,6 +13578,7 @@
           <a:lstStyle/>
           <a:p>
             <a:pPr algn="ctr"/>
+            <a:endParaRPr/>
           </a:p>
         </p:txBody>
       </p:sp>
@@ -13504,6 +13659,7 @@
           <a:lstStyle/>
           <a:p>
             <a:pPr algn="ctr"/>
+            <a:endParaRPr/>
           </a:p>
         </p:txBody>
       </p:sp>
@@ -13582,6 +13738,7 @@
           <a:lstStyle/>
           <a:p>
             <a:pPr algn="ctr"/>
+            <a:endParaRPr/>
           </a:p>
         </p:txBody>
       </p:sp>
@@ -13625,6 +13782,7 @@
           <a:lstStyle/>
           <a:p>
             <a:pPr algn="ctr"/>
+            <a:endParaRPr/>
           </a:p>
         </p:txBody>
       </p:sp>
@@ -13703,6 +13861,7 @@
           <a:lstStyle/>
           <a:p>
             <a:pPr algn="ctr"/>
+            <a:endParaRPr/>
           </a:p>
         </p:txBody>
       </p:sp>
@@ -13781,6 +13940,7 @@
           <a:lstStyle/>
           <a:p>
             <a:pPr algn="ctr"/>
+            <a:endParaRPr/>
           </a:p>
         </p:txBody>
       </p:sp>
@@ -13859,6 +14019,7 @@
           <a:lstStyle/>
           <a:p>
             <a:pPr algn="ctr"/>
+            <a:endParaRPr/>
           </a:p>
         </p:txBody>
       </p:sp>
@@ -13937,6 +14098,7 @@
           <a:lstStyle/>
           <a:p>
             <a:pPr algn="ctr"/>
+            <a:endParaRPr/>
           </a:p>
         </p:txBody>
       </p:sp>
@@ -14050,6 +14212,7 @@
           <a:lstStyle/>
           <a:p>
             <a:pPr algn="ctr"/>
+            <a:endParaRPr/>
           </a:p>
         </p:txBody>
       </p:sp>
@@ -14093,6 +14256,7 @@
           <a:lstStyle/>
           <a:p>
             <a:pPr algn="ctr"/>
+            <a:endParaRPr/>
           </a:p>
         </p:txBody>
       </p:sp>
@@ -14208,6 +14372,7 @@
           <a:lstStyle/>
           <a:p>
             <a:pPr algn="ctr"/>
+            <a:endParaRPr/>
           </a:p>
         </p:txBody>
       </p:sp>
@@ -14286,6 +14451,7 @@
           <a:lstStyle/>
           <a:p>
             <a:pPr algn="ctr"/>
+            <a:endParaRPr/>
           </a:p>
         </p:txBody>
       </p:sp>
@@ -14366,6 +14532,7 @@
           <a:lstStyle/>
           <a:p>
             <a:pPr algn="ctr"/>
+            <a:endParaRPr/>
           </a:p>
         </p:txBody>
       </p:sp>
@@ -14444,6 +14611,7 @@
           <a:lstStyle/>
           <a:p>
             <a:pPr algn="ctr"/>
+            <a:endParaRPr/>
           </a:p>
         </p:txBody>
       </p:sp>
@@ -14524,6 +14692,7 @@
           <a:lstStyle/>
           <a:p>
             <a:pPr algn="ctr"/>
+            <a:endParaRPr/>
           </a:p>
         </p:txBody>
       </p:sp>
@@ -14602,6 +14771,7 @@
           <a:lstStyle/>
           <a:p>
             <a:pPr algn="ctr"/>
+            <a:endParaRPr/>
           </a:p>
         </p:txBody>
       </p:sp>
@@ -14682,6 +14852,7 @@
           <a:lstStyle/>
           <a:p>
             <a:pPr algn="ctr"/>
+            <a:endParaRPr/>
           </a:p>
         </p:txBody>
       </p:sp>
@@ -14760,6 +14931,7 @@
           <a:lstStyle/>
           <a:p>
             <a:pPr algn="ctr"/>
+            <a:endParaRPr/>
           </a:p>
         </p:txBody>
       </p:sp>
@@ -14838,6 +15010,7 @@
           <a:lstStyle/>
           <a:p>
             <a:pPr algn="ctr"/>
+            <a:endParaRPr/>
           </a:p>
         </p:txBody>
       </p:sp>
@@ -14986,6 +15159,7 @@
           <a:lstStyle/>
           <a:p>
             <a:pPr algn="ctr"/>
+            <a:endParaRPr/>
           </a:p>
         </p:txBody>
       </p:sp>
@@ -15064,6 +15238,7 @@
           <a:lstStyle/>
           <a:p>
             <a:pPr algn="ctr"/>
+            <a:endParaRPr/>
           </a:p>
         </p:txBody>
       </p:sp>
@@ -15142,6 +15317,7 @@
           <a:lstStyle/>
           <a:p>
             <a:pPr algn="ctr"/>
+            <a:endParaRPr/>
           </a:p>
         </p:txBody>
       </p:sp>
@@ -15185,6 +15361,7 @@
           <a:lstStyle/>
           <a:p>
             <a:pPr algn="ctr"/>
+            <a:endParaRPr/>
           </a:p>
         </p:txBody>
       </p:sp>
@@ -15228,6 +15405,7 @@
           <a:lstStyle/>
           <a:p>
             <a:pPr algn="ctr"/>
+            <a:endParaRPr/>
           </a:p>
         </p:txBody>
       </p:sp>
@@ -15271,6 +15449,7 @@
           <a:lstStyle/>
           <a:p>
             <a:pPr algn="ctr"/>
+            <a:endParaRPr/>
           </a:p>
         </p:txBody>
       </p:sp>
@@ -15314,6 +15493,7 @@
           <a:lstStyle/>
           <a:p>
             <a:pPr algn="ctr"/>
+            <a:endParaRPr/>
           </a:p>
         </p:txBody>
       </p:sp>
@@ -15357,6 +15537,7 @@
           <a:lstStyle/>
           <a:p>
             <a:pPr algn="ctr"/>
+            <a:endParaRPr/>
           </a:p>
         </p:txBody>
       </p:sp>
@@ -15400,6 +15581,7 @@
           <a:lstStyle/>
           <a:p>
             <a:pPr algn="ctr"/>
+            <a:endParaRPr/>
           </a:p>
         </p:txBody>
       </p:sp>
@@ -15445,6 +15627,7 @@
           <a:lstStyle/>
           <a:p>
             <a:pPr algn="ctr"/>
+            <a:endParaRPr/>
           </a:p>
         </p:txBody>
       </p:sp>
@@ -15488,6 +15671,7 @@
           <a:lstStyle/>
           <a:p>
             <a:pPr algn="ctr"/>
+            <a:endParaRPr/>
           </a:p>
         </p:txBody>
       </p:sp>
@@ -15603,6 +15787,7 @@
           <a:lstStyle/>
           <a:p>
             <a:pPr algn="ctr"/>
+            <a:endParaRPr/>
           </a:p>
         </p:txBody>
       </p:sp>
@@ -15646,6 +15831,7 @@
           <a:lstStyle/>
           <a:p>
             <a:pPr algn="ctr"/>
+            <a:endParaRPr/>
           </a:p>
         </p:txBody>
       </p:sp>
@@ -15657,7 +15843,7 @@
         </p:nvSpPr>
         <p:spPr>
           <a:xfrm>
-            <a:off x="6748272" y="2450592"/>
+            <a:off x="6748272" y="2479168"/>
             <a:ext cx="4846320" cy="365760"/>
           </a:xfrm>
           <a:prstGeom prst="rect">
@@ -15761,6 +15947,7 @@
           <a:lstStyle/>
           <a:p>
             <a:pPr algn="ctr"/>
+            <a:endParaRPr/>
           </a:p>
         </p:txBody>
       </p:sp>
@@ -15804,6 +15991,7 @@
           <a:lstStyle/>
           <a:p>
             <a:pPr algn="ctr"/>
+            <a:endParaRPr/>
           </a:p>
         </p:txBody>
       </p:sp>
@@ -15866,7 +16054,7 @@
           <a:p>
             <a:pPr algn="l"/>
             <a:r>
-              <a:rPr sz="1100" b="0">
+              <a:rPr sz="1100" b="0" dirty="0">
                 <a:solidFill>
                   <a:srgbClr val="4A4A5A"/>
                 </a:solidFill>
@@ -15919,6 +16107,7 @@
           <a:lstStyle/>
           <a:p>
             <a:pPr algn="ctr"/>
+            <a:endParaRPr/>
           </a:p>
         </p:txBody>
       </p:sp>
@@ -15962,6 +16151,7 @@
           <a:lstStyle/>
           <a:p>
             <a:pPr algn="ctr"/>
+            <a:endParaRPr/>
           </a:p>
         </p:txBody>
       </p:sp>
@@ -16024,7 +16214,7 @@
           <a:p>
             <a:pPr algn="l"/>
             <a:r>
-              <a:rPr sz="1100" b="0">
+              <a:rPr sz="1100" b="0" dirty="0">
                 <a:solidFill>
                   <a:srgbClr val="4A4A5A"/>
                 </a:solidFill>
@@ -16044,7 +16234,7 @@
 </file>
 
 <file path=ppt/slides/slide7.xml><?xml version="1.0" encoding="utf-8"?>
-<p:sld xmlns:a="http://schemas.openxmlformats.org/drawingml/2006/main" xmlns:p="http://schemas.openxmlformats.org/presentationml/2006/main" xmlns:r="http://schemas.openxmlformats.org/officeDocument/2006/relationships">
+<p:sld xmlns:a="http://schemas.openxmlformats.org/drawingml/2006/main" xmlns:r="http://schemas.openxmlformats.org/officeDocument/2006/relationships" xmlns:p="http://schemas.openxmlformats.org/presentationml/2006/main">
   <p:cSld>
     <p:spTree>
       <p:nvGrpSpPr>
@@ -16052,7 +16242,14 @@
         <p:cNvGrpSpPr/>
         <p:nvPr/>
       </p:nvGrpSpPr>
-      <p:grpSpPr/>
+      <p:grpSpPr>
+        <a:xfrm>
+          <a:off x="0" y="0"/>
+          <a:ext cx="0" cy="0"/>
+          <a:chOff x="0" y="0"/>
+          <a:chExt cx="0" cy="0"/>
+        </a:xfrm>
+      </p:grpSpPr>
       <p:sp>
         <p:nvSpPr>
           <p:cNvPr id="2" name="Rectangle 1"/>
@@ -16093,6 +16290,7 @@
           <a:lstStyle/>
           <a:p>
             <a:pPr algn="ctr"/>
+            <a:endParaRPr/>
           </a:p>
         </p:txBody>
       </p:sp>
@@ -16136,6 +16334,7 @@
           <a:lstStyle/>
           <a:p>
             <a:pPr algn="ctr"/>
+            <a:endParaRPr/>
           </a:p>
         </p:txBody>
       </p:sp>
@@ -16216,6 +16415,7 @@
           <a:lstStyle/>
           <a:p>
             <a:pPr algn="ctr"/>
+            <a:endParaRPr/>
           </a:p>
         </p:txBody>
       </p:sp>
@@ -16294,6 +16494,7 @@
           <a:lstStyle/>
           <a:p>
             <a:pPr algn="ctr"/>
+            <a:endParaRPr/>
           </a:p>
         </p:txBody>
       </p:sp>
@@ -16337,6 +16538,7 @@
           <a:lstStyle/>
           <a:p>
             <a:pPr algn="ctr"/>
+            <a:endParaRPr/>
           </a:p>
         </p:txBody>
       </p:sp>
@@ -16380,6 +16582,7 @@
           <a:lstStyle/>
           <a:p>
             <a:pPr algn="ctr"/>
+            <a:endParaRPr/>
           </a:p>
         </p:txBody>
       </p:sp>
@@ -16740,6 +16943,7 @@
           <a:lstStyle/>
           <a:p>
             <a:pPr algn="ctr"/>
+            <a:endParaRPr/>
           </a:p>
         </p:txBody>
       </p:sp>
@@ -16958,6 +17162,7 @@
           <a:lstStyle/>
           <a:p>
             <a:pPr algn="ctr"/>
+            <a:endParaRPr/>
           </a:p>
         </p:txBody>
       </p:sp>
@@ -17281,6 +17486,7 @@
           <a:lstStyle/>
           <a:p>
             <a:pPr algn="ctr"/>
+            <a:endParaRPr/>
           </a:p>
         </p:txBody>
       </p:sp>
@@ -17604,6 +17810,7 @@
           <a:lstStyle/>
           <a:p>
             <a:pPr algn="ctr"/>
+            <a:endParaRPr/>
           </a:p>
         </p:txBody>
       </p:sp>
@@ -17927,6 +18134,7 @@
           <a:lstStyle/>
           <a:p>
             <a:pPr algn="ctr"/>
+            <a:endParaRPr/>
           </a:p>
         </p:txBody>
       </p:sp>
@@ -18079,7 +18287,7 @@
 </file>
 
 <file path=ppt/slides/slide8.xml><?xml version="1.0" encoding="utf-8"?>
-<p:sld xmlns:a="http://schemas.openxmlformats.org/drawingml/2006/main" xmlns:p="http://schemas.openxmlformats.org/presentationml/2006/main" xmlns:r="http://schemas.openxmlformats.org/officeDocument/2006/relationships">
+<p:sld xmlns:a="http://schemas.openxmlformats.org/drawingml/2006/main" xmlns:r="http://schemas.openxmlformats.org/officeDocument/2006/relationships" xmlns:p="http://schemas.openxmlformats.org/presentationml/2006/main">
   <p:cSld>
     <p:spTree>
       <p:nvGrpSpPr>
@@ -18087,7 +18295,14 @@
         <p:cNvGrpSpPr/>
         <p:nvPr/>
       </p:nvGrpSpPr>
-      <p:grpSpPr/>
+      <p:grpSpPr>
+        <a:xfrm>
+          <a:off x="0" y="0"/>
+          <a:ext cx="0" cy="0"/>
+          <a:chOff x="0" y="0"/>
+          <a:chExt cx="0" cy="0"/>
+        </a:xfrm>
+      </p:grpSpPr>
       <p:sp>
         <p:nvSpPr>
           <p:cNvPr id="2" name="Rectangle 1"/>
@@ -18128,6 +18343,7 @@
           <a:lstStyle/>
           <a:p>
             <a:pPr algn="ctr"/>
+            <a:endParaRPr/>
           </a:p>
         </p:txBody>
       </p:sp>
@@ -18171,6 +18387,7 @@
           <a:lstStyle/>
           <a:p>
             <a:pPr algn="ctr"/>
+            <a:endParaRPr/>
           </a:p>
         </p:txBody>
       </p:sp>
@@ -18251,6 +18468,7 @@
           <a:lstStyle/>
           <a:p>
             <a:pPr algn="ctr"/>
+            <a:endParaRPr/>
           </a:p>
         </p:txBody>
       </p:sp>
@@ -18294,6 +18512,7 @@
           <a:lstStyle/>
           <a:p>
             <a:pPr algn="ctr"/>
+            <a:endParaRPr/>
           </a:p>
         </p:txBody>
       </p:sp>
@@ -18372,6 +18591,7 @@
           <a:lstStyle/>
           <a:p>
             <a:pPr algn="ctr"/>
+            <a:endParaRPr/>
           </a:p>
         </p:txBody>
       </p:sp>
@@ -18450,6 +18670,7 @@
           <a:lstStyle/>
           <a:p>
             <a:pPr algn="ctr"/>
+            <a:endParaRPr/>
           </a:p>
         </p:txBody>
       </p:sp>
@@ -18598,6 +18819,7 @@
           <a:lstStyle/>
           <a:p>
             <a:pPr algn="ctr"/>
+            <a:endParaRPr/>
           </a:p>
         </p:txBody>
       </p:sp>
@@ -18713,6 +18935,7 @@
           <a:lstStyle/>
           <a:p>
             <a:pPr algn="ctr"/>
+            <a:endParaRPr/>
           </a:p>
         </p:txBody>
       </p:sp>
@@ -18756,6 +18979,7 @@
           <a:lstStyle/>
           <a:p>
             <a:pPr algn="ctr"/>
+            <a:endParaRPr/>
           </a:p>
         </p:txBody>
       </p:sp>
@@ -18834,6 +19058,7 @@
           <a:lstStyle/>
           <a:p>
             <a:pPr algn="ctr"/>
+            <a:endParaRPr/>
           </a:p>
         </p:txBody>
       </p:sp>
@@ -18912,6 +19137,7 @@
           <a:lstStyle/>
           <a:p>
             <a:pPr algn="ctr"/>
+            <a:endParaRPr/>
           </a:p>
         </p:txBody>
       </p:sp>
@@ -19060,6 +19286,7 @@
           <a:lstStyle/>
           <a:p>
             <a:pPr algn="ctr"/>
+            <a:endParaRPr/>
           </a:p>
         </p:txBody>
       </p:sp>
@@ -19175,6 +19402,7 @@
           <a:lstStyle/>
           <a:p>
             <a:pPr algn="ctr"/>
+            <a:endParaRPr/>
           </a:p>
         </p:txBody>
       </p:sp>
@@ -19218,6 +19446,7 @@
           <a:lstStyle/>
           <a:p>
             <a:pPr algn="ctr"/>
+            <a:endParaRPr/>
           </a:p>
         </p:txBody>
       </p:sp>
@@ -19296,6 +19525,7 @@
           <a:lstStyle/>
           <a:p>
             <a:pPr algn="ctr"/>
+            <a:endParaRPr/>
           </a:p>
         </p:txBody>
       </p:sp>
@@ -19374,6 +19604,7 @@
           <a:lstStyle/>
           <a:p>
             <a:pPr algn="ctr"/>
+            <a:endParaRPr/>
           </a:p>
         </p:txBody>
       </p:sp>
@@ -19522,6 +19753,7 @@
           <a:lstStyle/>
           <a:p>
             <a:pPr algn="ctr"/>
+            <a:endParaRPr/>
           </a:p>
         </p:txBody>
       </p:sp>
@@ -19637,6 +19869,7 @@
           <a:lstStyle/>
           <a:p>
             <a:pPr algn="ctr"/>
+            <a:endParaRPr/>
           </a:p>
         </p:txBody>
       </p:sp>
@@ -19680,6 +19913,7 @@
           <a:lstStyle/>
           <a:p>
             <a:pPr algn="ctr"/>
+            <a:endParaRPr/>
           </a:p>
         </p:txBody>
       </p:sp>
@@ -19758,6 +19992,7 @@
           <a:lstStyle/>
           <a:p>
             <a:pPr algn="ctr"/>
+            <a:endParaRPr/>
           </a:p>
         </p:txBody>
       </p:sp>
@@ -19836,6 +20071,7 @@
           <a:lstStyle/>
           <a:p>
             <a:pPr algn="ctr"/>
+            <a:endParaRPr/>
           </a:p>
         </p:txBody>
       </p:sp>
@@ -19984,6 +20220,7 @@
           <a:lstStyle/>
           <a:p>
             <a:pPr algn="ctr"/>
+            <a:endParaRPr/>
           </a:p>
         </p:txBody>
       </p:sp>
@@ -20099,6 +20336,7 @@
           <a:lstStyle/>
           <a:p>
             <a:pPr algn="ctr"/>
+            <a:endParaRPr/>
           </a:p>
         </p:txBody>
       </p:sp>
@@ -20142,6 +20380,7 @@
           <a:lstStyle/>
           <a:p>
             <a:pPr algn="ctr"/>
+            <a:endParaRPr/>
           </a:p>
         </p:txBody>
       </p:sp>
@@ -20220,6 +20459,7 @@
           <a:lstStyle/>
           <a:p>
             <a:pPr algn="ctr"/>
+            <a:endParaRPr/>
           </a:p>
         </p:txBody>
       </p:sp>
@@ -20298,6 +20538,7 @@
           <a:lstStyle/>
           <a:p>
             <a:pPr algn="ctr"/>
+            <a:endParaRPr/>
           </a:p>
         </p:txBody>
       </p:sp>
@@ -20446,6 +20687,7 @@
           <a:lstStyle/>
           <a:p>
             <a:pPr algn="ctr"/>
+            <a:endParaRPr/>
           </a:p>
         </p:txBody>
       </p:sp>
@@ -20561,6 +20803,7 @@
           <a:lstStyle/>
           <a:p>
             <a:pPr algn="ctr"/>
+            <a:endParaRPr/>
           </a:p>
         </p:txBody>
       </p:sp>
@@ -20604,6 +20847,7 @@
           <a:lstStyle/>
           <a:p>
             <a:pPr algn="ctr"/>
+            <a:endParaRPr/>
           </a:p>
         </p:txBody>
       </p:sp>
@@ -20682,6 +20926,7 @@
           <a:lstStyle/>
           <a:p>
             <a:pPr algn="ctr"/>
+            <a:endParaRPr/>
           </a:p>
         </p:txBody>
       </p:sp>
@@ -20760,6 +21005,7 @@
           <a:lstStyle/>
           <a:p>
             <a:pPr algn="ctr"/>
+            <a:endParaRPr/>
           </a:p>
         </p:txBody>
       </p:sp>
@@ -20908,6 +21154,7 @@
           <a:lstStyle/>
           <a:p>
             <a:pPr algn="ctr"/>
+            <a:endParaRPr/>
           </a:p>
         </p:txBody>
       </p:sp>
@@ -20990,7 +21237,7 @@
 </file>
 
 <file path=ppt/slides/slide9.xml><?xml version="1.0" encoding="utf-8"?>
-<p:sld xmlns:a="http://schemas.openxmlformats.org/drawingml/2006/main" xmlns:p="http://schemas.openxmlformats.org/presentationml/2006/main" xmlns:r="http://schemas.openxmlformats.org/officeDocument/2006/relationships">
+<p:sld xmlns:a="http://schemas.openxmlformats.org/drawingml/2006/main" xmlns:r="http://schemas.openxmlformats.org/officeDocument/2006/relationships" xmlns:p="http://schemas.openxmlformats.org/presentationml/2006/main">
   <p:cSld>
     <p:spTree>
       <p:nvGrpSpPr>
@@ -20998,7 +21245,14 @@
         <p:cNvGrpSpPr/>
         <p:nvPr/>
       </p:nvGrpSpPr>
-      <p:grpSpPr/>
+      <p:grpSpPr>
+        <a:xfrm>
+          <a:off x="0" y="0"/>
+          <a:ext cx="0" cy="0"/>
+          <a:chOff x="0" y="0"/>
+          <a:chExt cx="0" cy="0"/>
+        </a:xfrm>
+      </p:grpSpPr>
       <p:sp>
         <p:nvSpPr>
           <p:cNvPr id="2" name="Rectangle 1"/>
@@ -21007,7 +21261,7 @@
         </p:nvSpPr>
         <p:spPr>
           <a:xfrm>
-            <a:off x="0" y="0"/>
+            <a:off x="0" y="452628"/>
             <a:ext cx="12188952" cy="6858000"/>
           </a:xfrm>
           <a:prstGeom prst="rect">
@@ -21039,6 +21293,7 @@
           <a:lstStyle/>
           <a:p>
             <a:pPr algn="ctr"/>
+            <a:endParaRPr/>
           </a:p>
         </p:txBody>
       </p:sp>
@@ -21082,6 +21337,7 @@
           <a:lstStyle/>
           <a:p>
             <a:pPr algn="ctr"/>
+            <a:endParaRPr/>
           </a:p>
         </p:txBody>
       </p:sp>
@@ -21162,6 +21418,7 @@
           <a:lstStyle/>
           <a:p>
             <a:pPr algn="ctr"/>
+            <a:endParaRPr/>
           </a:p>
         </p:txBody>
       </p:sp>
@@ -21205,6 +21462,7 @@
           <a:lstStyle/>
           <a:p>
             <a:pPr algn="ctr"/>
+            <a:endParaRPr/>
           </a:p>
         </p:txBody>
       </p:sp>
@@ -21248,6 +21506,7 @@
           <a:lstStyle/>
           <a:p>
             <a:pPr algn="ctr"/>
+            <a:endParaRPr/>
           </a:p>
         </p:txBody>
       </p:sp>
@@ -21330,7 +21589,7 @@
         <p:spPr>
           <a:xfrm>
             <a:off x="713232" y="1572768"/>
-            <a:ext cx="5074920" cy="1810512"/>
+            <a:ext cx="5074920" cy="769441"/>
           </a:xfrm>
           <a:prstGeom prst="rect">
             <a:avLst/>
@@ -21345,13 +21604,139 @@
           <a:p>
             <a:pPr algn="l"/>
             <a:r>
-              <a:rPr sz="1100" b="0">
+              <a:rPr sz="1100" b="0" dirty="0">
                 <a:solidFill>
                   <a:srgbClr val="4A4A5A"/>
                 </a:solidFill>
                 <a:latin typeface="Calibri"/>
               </a:rPr>
-              <a:t>Before this analysis, CollabX was built with a developer's mental model. Features were implemented — AI Score, template buttons, skill gap analysis — but eye-tracking thinking revealed they exist in code, not in user attention. The most useful features were in the most ignored screen zones.</a:t>
+              <a:t>Before this analysis, </a:t>
+            </a:r>
+            <a:r>
+              <a:rPr sz="1100" b="0" dirty="0" err="1">
+                <a:solidFill>
+                  <a:srgbClr val="4A4A5A"/>
+                </a:solidFill>
+                <a:latin typeface="Calibri"/>
+              </a:rPr>
+              <a:t>CollabX</a:t>
+            </a:r>
+            <a:r>
+              <a:rPr sz="1100" b="0" dirty="0">
+                <a:solidFill>
+                  <a:srgbClr val="4A4A5A"/>
+                </a:solidFill>
+                <a:latin typeface="Calibri"/>
+              </a:rPr>
+              <a:t> was built with a </a:t>
+            </a:r>
+            <a:r>
+              <a:rPr lang="fi-FI" sz="1100" dirty="0" err="1">
+                <a:solidFill>
+                  <a:srgbClr val="4A4A5A"/>
+                </a:solidFill>
+                <a:latin typeface="Calibri"/>
+              </a:rPr>
+              <a:t>user’s</a:t>
+            </a:r>
+            <a:r>
+              <a:rPr lang="fi-FI" sz="1100" dirty="0">
+                <a:solidFill>
+                  <a:srgbClr val="4A4A5A"/>
+                </a:solidFill>
+                <a:latin typeface="Calibri"/>
+              </a:rPr>
+              <a:t> </a:t>
+            </a:r>
+            <a:r>
+              <a:rPr sz="1100" b="0" dirty="0">
+                <a:solidFill>
+                  <a:srgbClr val="4A4A5A"/>
+                </a:solidFill>
+                <a:latin typeface="Calibri"/>
+              </a:rPr>
+              <a:t>mental model. Features were implemented — AI Score, template buttons, skill gap analysis — but eye-tracking thinking revealed they exist in code, </a:t>
+            </a:r>
+            <a:r>
+              <a:rPr lang="fi-FI" sz="1100" b="0" dirty="0" err="1">
+                <a:solidFill>
+                  <a:srgbClr val="4A4A5A"/>
+                </a:solidFill>
+                <a:latin typeface="Calibri"/>
+              </a:rPr>
+              <a:t>but</a:t>
+            </a:r>
+            <a:r>
+              <a:rPr lang="fi-FI" sz="1100" b="0" dirty="0">
+                <a:solidFill>
+                  <a:srgbClr val="4A4A5A"/>
+                </a:solidFill>
+                <a:latin typeface="Calibri"/>
+              </a:rPr>
+              <a:t> </a:t>
+            </a:r>
+            <a:r>
+              <a:rPr lang="fi-FI" sz="1100" b="0" dirty="0" err="1">
+                <a:solidFill>
+                  <a:srgbClr val="4A4A5A"/>
+                </a:solidFill>
+                <a:latin typeface="Calibri"/>
+              </a:rPr>
+              <a:t>were</a:t>
+            </a:r>
+            <a:r>
+              <a:rPr lang="fi-FI" sz="1100" b="0" dirty="0">
+                <a:solidFill>
+                  <a:srgbClr val="4A4A5A"/>
+                </a:solidFill>
+                <a:latin typeface="Calibri"/>
+              </a:rPr>
+              <a:t> </a:t>
+            </a:r>
+            <a:r>
+              <a:rPr sz="1100" b="0" dirty="0">
+                <a:solidFill>
+                  <a:srgbClr val="4A4A5A"/>
+                </a:solidFill>
+                <a:latin typeface="Calibri"/>
+              </a:rPr>
+              <a:t>not</a:t>
+            </a:r>
+            <a:r>
+              <a:rPr lang="fi-FI" sz="1100" b="0" dirty="0">
+                <a:solidFill>
+                  <a:srgbClr val="4A4A5A"/>
+                </a:solidFill>
+                <a:latin typeface="Calibri"/>
+              </a:rPr>
+              <a:t> </a:t>
+            </a:r>
+            <a:r>
+              <a:rPr lang="fi-FI" sz="1100" b="0" dirty="0" err="1">
+                <a:solidFill>
+                  <a:srgbClr val="4A4A5A"/>
+                </a:solidFill>
+                <a:latin typeface="Calibri"/>
+              </a:rPr>
+              <a:t>coming</a:t>
+            </a:r>
+            <a:r>
+              <a:rPr lang="fi-FI" sz="1100" b="0" dirty="0">
+                <a:solidFill>
+                  <a:srgbClr val="4A4A5A"/>
+                </a:solidFill>
+                <a:latin typeface="Calibri"/>
+              </a:rPr>
+              <a:t> </a:t>
+            </a:r>
+            <a:r>
+              <a:rPr sz="1100" b="0" dirty="0">
+                <a:solidFill>
+                  <a:srgbClr val="4A4A5A"/>
+                </a:solidFill>
+                <a:latin typeface="Calibri"/>
+              </a:rPr>
+              <a:t> in user attention. The most useful features were in the most ignored screen zones.</a:t>
             </a:r>
           </a:p>
         </p:txBody>
@@ -21364,8 +21749,8 @@
         </p:nvSpPr>
         <p:spPr>
           <a:xfrm>
-            <a:off x="6309360" y="914400"/>
-            <a:ext cx="5486400" cy="2633472"/>
+            <a:off x="6345936" y="868680"/>
+            <a:ext cx="5486400" cy="2679192"/>
           </a:xfrm>
           <a:prstGeom prst="rect">
             <a:avLst/>
@@ -21398,6 +21783,7 @@
           <a:lstStyle/>
           <a:p>
             <a:pPr algn="ctr"/>
+            <a:endParaRPr/>
           </a:p>
         </p:txBody>
       </p:sp>
@@ -21441,6 +21827,7 @@
           <a:lstStyle/>
           <a:p>
             <a:pPr algn="ctr"/>
+            <a:endParaRPr/>
           </a:p>
         </p:txBody>
       </p:sp>
@@ -21484,6 +21871,7 @@
           <a:lstStyle/>
           <a:p>
             <a:pPr algn="ctr"/>
+            <a:endParaRPr/>
           </a:p>
         </p:txBody>
       </p:sp>
@@ -21546,7 +21934,7 @@
           <a:p>
             <a:pPr algn="l"/>
             <a:r>
-              <a:rPr sz="1300" b="1">
+              <a:rPr sz="1300" b="1" dirty="0">
                 <a:solidFill>
                   <a:srgbClr val="06D6A0"/>
                 </a:solidFill>
@@ -21566,7 +21954,7 @@
         <p:spPr>
           <a:xfrm>
             <a:off x="6565392" y="1572768"/>
-            <a:ext cx="5074920" cy="1810512"/>
+            <a:ext cx="5074920" cy="769441"/>
           </a:xfrm>
           <a:prstGeom prst="rect">
             <a:avLst/>
@@ -21581,381 +21969,77 @@
           <a:p>
             <a:pPr algn="l"/>
             <a:r>
-              <a:rPr sz="1100" b="0">
+              <a:rPr sz="1100" b="0" dirty="0">
                 <a:solidFill>
                   <a:srgbClr val="4A4A5A"/>
                 </a:solidFill>
                 <a:latin typeface="Calibri"/>
               </a:rPr>
-              <a:t>6 concrete improvements were identified and implemented based on eye-tracking principles: templates made full-width, AI score repositioned, gap analysis moved to top, admin sequential reveal added, score badge enlarged, completeness bar replaced with circular indicator.</a:t>
-            </a:r>
-          </a:p>
-        </p:txBody>
-      </p:sp>
-      <p:sp>
-        <p:nvSpPr>
-          <p:cNvPr id="17" name="Rectangle 16"/>
-          <p:cNvSpPr/>
-          <p:nvPr/>
-        </p:nvSpPr>
-        <p:spPr>
-          <a:xfrm>
-            <a:off x="457200" y="3749039"/>
-            <a:ext cx="5486400" cy="2633472"/>
-          </a:xfrm>
-          <a:prstGeom prst="rect">
-            <a:avLst/>
-          </a:prstGeom>
-          <a:solidFill>
-            <a:srgbClr val="FFEEEE"/>
-          </a:solidFill>
-          <a:ln w="25400">
-            <a:solidFill>
-              <a:srgbClr val="FF6B6B"/>
-            </a:solidFill>
-          </a:ln>
-        </p:spPr>
-        <p:style>
-          <a:lnRef idx="1">
-            <a:schemeClr val="accent1"/>
-          </a:lnRef>
-          <a:fillRef idx="3">
-            <a:schemeClr val="accent1"/>
-          </a:fillRef>
-          <a:effectRef idx="2">
-            <a:schemeClr val="accent1"/>
-          </a:effectRef>
-          <a:fontRef idx="minor">
-            <a:schemeClr val="lt1"/>
-          </a:fontRef>
-        </p:style>
-        <p:txBody>
-          <a:bodyPr rtlCol="0" anchor="ctr"/>
-          <a:lstStyle/>
-          <a:p>
-            <a:pPr algn="ctr"/>
-          </a:p>
-        </p:txBody>
-      </p:sp>
-      <p:sp>
-        <p:nvSpPr>
-          <p:cNvPr id="18" name="Rectangle 17"/>
-          <p:cNvSpPr/>
-          <p:nvPr/>
-        </p:nvSpPr>
-        <p:spPr>
-          <a:xfrm>
-            <a:off x="457200" y="3749039"/>
-            <a:ext cx="73152" cy="2633472"/>
-          </a:xfrm>
-          <a:prstGeom prst="rect">
-            <a:avLst/>
-          </a:prstGeom>
-          <a:solidFill>
-            <a:srgbClr val="FF6B6B"/>
-          </a:solidFill>
-          <a:ln>
-            <a:noFill/>
-          </a:ln>
-        </p:spPr>
-        <p:style>
-          <a:lnRef idx="1">
-            <a:schemeClr val="accent1"/>
-          </a:lnRef>
-          <a:fillRef idx="3">
-            <a:schemeClr val="accent1"/>
-          </a:fillRef>
-          <a:effectRef idx="2">
-            <a:schemeClr val="accent1"/>
-          </a:effectRef>
-          <a:fontRef idx="minor">
-            <a:schemeClr val="lt1"/>
-          </a:fontRef>
-        </p:style>
-        <p:txBody>
-          <a:bodyPr rtlCol="0" anchor="ctr"/>
-          <a:lstStyle/>
-          <a:p>
-            <a:pPr algn="ctr"/>
-          </a:p>
-        </p:txBody>
-      </p:sp>
-      <p:sp>
-        <p:nvSpPr>
-          <p:cNvPr id="19" name="Oval 18"/>
-          <p:cNvSpPr/>
-          <p:nvPr/>
-        </p:nvSpPr>
-        <p:spPr>
-          <a:xfrm>
-            <a:off x="640080" y="3886200"/>
-            <a:ext cx="502920" cy="502920"/>
-          </a:xfrm>
-          <a:prstGeom prst="ellipse">
-            <a:avLst/>
-          </a:prstGeom>
-          <a:solidFill>
-            <a:srgbClr val="FF6B6B"/>
-          </a:solidFill>
-          <a:ln>
-            <a:noFill/>
-          </a:ln>
-        </p:spPr>
-        <p:style>
-          <a:lnRef idx="1">
-            <a:schemeClr val="accent1"/>
-          </a:lnRef>
-          <a:fillRef idx="3">
-            <a:schemeClr val="accent1"/>
-          </a:fillRef>
-          <a:effectRef idx="2">
-            <a:schemeClr val="accent1"/>
-          </a:effectRef>
-          <a:fontRef idx="minor">
-            <a:schemeClr val="lt1"/>
-          </a:fontRef>
-        </p:style>
-        <p:txBody>
-          <a:bodyPr rtlCol="0" anchor="ctr"/>
-          <a:lstStyle/>
-          <a:p>
-            <a:pPr algn="ctr"/>
-          </a:p>
-        </p:txBody>
-      </p:sp>
-      <p:sp>
-        <p:nvSpPr>
-          <p:cNvPr id="20" name="TextBox 19"/>
-          <p:cNvSpPr txBox="1"/>
-          <p:nvPr/>
-        </p:nvSpPr>
-        <p:spPr>
-          <a:xfrm>
-            <a:off x="640080" y="3931920"/>
-            <a:ext cx="502920" cy="411480"/>
-          </a:xfrm>
-          <a:prstGeom prst="rect">
-            <a:avLst/>
-          </a:prstGeom>
-          <a:noFill/>
-        </p:spPr>
-        <p:txBody>
-          <a:bodyPr wrap="square">
-            <a:spAutoFit/>
-          </a:bodyPr>
-          <a:lstStyle/>
-          <a:p>
-            <a:pPr algn="ctr"/>
-            <a:r>
-              <a:rPr sz="1800" b="1">
-                <a:solidFill>
-                  <a:srgbClr val="FFFFFF"/>
-                </a:solidFill>
-                <a:latin typeface="Calibri"/>
-              </a:rPr>
-              <a:t>3</a:t>
-            </a:r>
-          </a:p>
-        </p:txBody>
-      </p:sp>
-      <p:sp>
-        <p:nvSpPr>
-          <p:cNvPr id="21" name="TextBox 20"/>
-          <p:cNvSpPr txBox="1"/>
-          <p:nvPr/>
-        </p:nvSpPr>
-        <p:spPr>
-          <a:xfrm>
-            <a:off x="1325880" y="3886200"/>
-            <a:ext cx="4389120" cy="411480"/>
-          </a:xfrm>
-          <a:prstGeom prst="rect">
-            <a:avLst/>
-          </a:prstGeom>
-          <a:noFill/>
-        </p:spPr>
-        <p:txBody>
-          <a:bodyPr wrap="square">
-            <a:spAutoFit/>
-          </a:bodyPr>
-          <a:lstStyle/>
-          <a:p>
-            <a:pPr algn="l"/>
-            <a:r>
-              <a:rPr sz="1300" b="1">
-                <a:solidFill>
-                  <a:srgbClr val="FF6B6B"/>
-                </a:solidFill>
-                <a:latin typeface="Calibri"/>
-              </a:rPr>
-              <a:t>Limitations of Analytical Approach</a:t>
-            </a:r>
-          </a:p>
-        </p:txBody>
-      </p:sp>
-      <p:sp>
-        <p:nvSpPr>
-          <p:cNvPr id="22" name="TextBox 21"/>
-          <p:cNvSpPr txBox="1"/>
-          <p:nvPr/>
-        </p:nvSpPr>
-        <p:spPr>
-          <a:xfrm>
-            <a:off x="713232" y="4407407"/>
-            <a:ext cx="5074920" cy="1810512"/>
-          </a:xfrm>
-          <a:prstGeom prst="rect">
-            <a:avLst/>
-          </a:prstGeom>
-          <a:noFill/>
-        </p:spPr>
-        <p:txBody>
-          <a:bodyPr wrap="square">
-            <a:spAutoFit/>
-          </a:bodyPr>
-          <a:lstStyle/>
-          <a:p>
-            <a:pPr algn="l"/>
-            <a:r>
-              <a:rPr sz="1100" b="0">
+              <a:t>6 concrete improvements were identified and </a:t>
+            </a:r>
+            <a:r>
+              <a:rPr lang="fi-FI" sz="1100" dirty="0" err="1">
                 <a:solidFill>
                   <a:srgbClr val="4A4A5A"/>
                 </a:solidFill>
                 <a:latin typeface="Calibri"/>
               </a:rPr>
-              <a:t>No real fixation data was collected. Individual reading differences are not captured. Emotional responses to colour and motion cannot be predicted analytically. Screen size variations (mobile vs desktop) were not analysed. These predictions are hypotheses, not measurements.</a:t>
-            </a:r>
-          </a:p>
-        </p:txBody>
-      </p:sp>
-      <p:sp>
-        <p:nvSpPr>
-          <p:cNvPr id="23" name="Rectangle 22"/>
-          <p:cNvSpPr/>
-          <p:nvPr/>
-        </p:nvSpPr>
-        <p:spPr>
-          <a:xfrm>
-            <a:off x="6309360" y="3749039"/>
-            <a:ext cx="5486400" cy="2633472"/>
-          </a:xfrm>
-          <a:prstGeom prst="rect">
-            <a:avLst/>
-          </a:prstGeom>
-          <a:solidFill>
-            <a:srgbClr val="FFF8E1"/>
-          </a:solidFill>
-          <a:ln w="25400">
-            <a:solidFill>
-              <a:srgbClr val="FFB703"/>
-            </a:solidFill>
-          </a:ln>
-        </p:spPr>
-        <p:style>
-          <a:lnRef idx="1">
-            <a:schemeClr val="accent1"/>
-          </a:lnRef>
-          <a:fillRef idx="3">
-            <a:schemeClr val="accent1"/>
-          </a:fillRef>
-          <a:effectRef idx="2">
-            <a:schemeClr val="accent1"/>
-          </a:effectRef>
-          <a:fontRef idx="minor">
-            <a:schemeClr val="lt1"/>
-          </a:fontRef>
-        </p:style>
-        <p:txBody>
-          <a:bodyPr rtlCol="0" anchor="ctr"/>
-          <a:lstStyle/>
-          <a:p>
-            <a:pPr algn="ctr"/>
-          </a:p>
-        </p:txBody>
-      </p:sp>
-      <p:sp>
-        <p:nvSpPr>
-          <p:cNvPr id="24" name="Rectangle 23"/>
-          <p:cNvSpPr/>
-          <p:nvPr/>
-        </p:nvSpPr>
-        <p:spPr>
-          <a:xfrm>
-            <a:off x="6309360" y="3749039"/>
-            <a:ext cx="73152" cy="2633472"/>
-          </a:xfrm>
-          <a:prstGeom prst="rect">
-            <a:avLst/>
-          </a:prstGeom>
-          <a:solidFill>
-            <a:srgbClr val="FFB703"/>
-          </a:solidFill>
-          <a:ln>
-            <a:noFill/>
-          </a:ln>
-        </p:spPr>
-        <p:style>
-          <a:lnRef idx="1">
-            <a:schemeClr val="accent1"/>
-          </a:lnRef>
-          <a:fillRef idx="3">
-            <a:schemeClr val="accent1"/>
-          </a:fillRef>
-          <a:effectRef idx="2">
-            <a:schemeClr val="accent1"/>
-          </a:effectRef>
-          <a:fontRef idx="minor">
-            <a:schemeClr val="lt1"/>
-          </a:fontRef>
-        </p:style>
-        <p:txBody>
-          <a:bodyPr rtlCol="0" anchor="ctr"/>
-          <a:lstStyle/>
-          <a:p>
-            <a:pPr algn="ctr"/>
-          </a:p>
-        </p:txBody>
-      </p:sp>
-      <p:sp>
-        <p:nvSpPr>
-          <p:cNvPr id="25" name="Oval 24"/>
-          <p:cNvSpPr/>
-          <p:nvPr/>
-        </p:nvSpPr>
-        <p:spPr>
-          <a:xfrm>
-            <a:off x="6492240" y="3886200"/>
-            <a:ext cx="502920" cy="502920"/>
-          </a:xfrm>
-          <a:prstGeom prst="ellipse">
-            <a:avLst/>
-          </a:prstGeom>
-          <a:solidFill>
-            <a:srgbClr val="FFB703"/>
-          </a:solidFill>
-          <a:ln>
-            <a:noFill/>
-          </a:ln>
-        </p:spPr>
-        <p:style>
-          <a:lnRef idx="1">
-            <a:schemeClr val="accent1"/>
-          </a:lnRef>
-          <a:fillRef idx="3">
-            <a:schemeClr val="accent1"/>
-          </a:fillRef>
-          <a:effectRef idx="2">
-            <a:schemeClr val="accent1"/>
-          </a:effectRef>
-          <a:fontRef idx="minor">
-            <a:schemeClr val="lt1"/>
-          </a:fontRef>
-        </p:style>
-        <p:txBody>
-          <a:bodyPr rtlCol="0" anchor="ctr"/>
-          <a:lstStyle/>
-          <a:p>
-            <a:pPr algn="ctr"/>
+              <a:t>have</a:t>
+            </a:r>
+            <a:r>
+              <a:rPr lang="fi-FI" sz="1100" dirty="0">
+                <a:solidFill>
+                  <a:srgbClr val="4A4A5A"/>
+                </a:solidFill>
+                <a:latin typeface="Calibri"/>
+              </a:rPr>
+              <a:t> </a:t>
+            </a:r>
+            <a:r>
+              <a:rPr lang="fi-FI" sz="1100" dirty="0" err="1">
+                <a:solidFill>
+                  <a:srgbClr val="4A4A5A"/>
+                </a:solidFill>
+                <a:latin typeface="Calibri"/>
+              </a:rPr>
+              <a:t>been</a:t>
+            </a:r>
+            <a:r>
+              <a:rPr lang="fi-FI" sz="1100" dirty="0">
+                <a:solidFill>
+                  <a:srgbClr val="4A4A5A"/>
+                </a:solidFill>
+                <a:latin typeface="Calibri"/>
+              </a:rPr>
+              <a:t> </a:t>
+            </a:r>
+            <a:r>
+              <a:rPr lang="fi-FI" sz="1100" dirty="0" err="1">
+                <a:solidFill>
+                  <a:srgbClr val="4A4A5A"/>
+                </a:solidFill>
+                <a:latin typeface="Calibri"/>
+              </a:rPr>
+              <a:t>worked</a:t>
+            </a:r>
+            <a:r>
+              <a:rPr lang="fi-FI" sz="1100" dirty="0">
+                <a:solidFill>
+                  <a:srgbClr val="4A4A5A"/>
+                </a:solidFill>
+                <a:latin typeface="Calibri"/>
+              </a:rPr>
+              <a:t> </a:t>
+            </a:r>
+            <a:r>
+              <a:rPr sz="1100" b="0" dirty="0">
+                <a:solidFill>
+                  <a:srgbClr val="4A4A5A"/>
+                </a:solidFill>
+                <a:latin typeface="Calibri"/>
+              </a:rPr>
+              <a:t>based on eye-tracking principles: templates made full-width, AI score repositioned, gap analysis moved to top, admin sequential reveal added, score badge enlarged, completeness bar replaced with circular indicator.</a:t>
+            </a:r>
           </a:p>
         </p:txBody>
       </p:sp>
@@ -21990,76 +22074,6 @@
                 <a:latin typeface="Calibri"/>
               </a:rPr>
               <a:t>4</a:t>
-            </a:r>
-          </a:p>
-        </p:txBody>
-      </p:sp>
-      <p:sp>
-        <p:nvSpPr>
-          <p:cNvPr id="27" name="TextBox 26"/>
-          <p:cNvSpPr txBox="1"/>
-          <p:nvPr/>
-        </p:nvSpPr>
-        <p:spPr>
-          <a:xfrm>
-            <a:off x="7178040" y="3886200"/>
-            <a:ext cx="4389120" cy="411480"/>
-          </a:xfrm>
-          <a:prstGeom prst="rect">
-            <a:avLst/>
-          </a:prstGeom>
-          <a:noFill/>
-        </p:spPr>
-        <p:txBody>
-          <a:bodyPr wrap="square">
-            <a:spAutoFit/>
-          </a:bodyPr>
-          <a:lstStyle/>
-          <a:p>
-            <a:pPr algn="l"/>
-            <a:r>
-              <a:rPr sz="1300" b="1">
-                <a:solidFill>
-                  <a:srgbClr val="FFB703"/>
-                </a:solidFill>
-                <a:latin typeface="Calibri"/>
-              </a:rPr>
-              <a:t>What Real Eye-Tracking Would Add</a:t>
-            </a:r>
-          </a:p>
-        </p:txBody>
-      </p:sp>
-      <p:sp>
-        <p:nvSpPr>
-          <p:cNvPr id="28" name="TextBox 27"/>
-          <p:cNvSpPr txBox="1"/>
-          <p:nvPr/>
-        </p:nvSpPr>
-        <p:spPr>
-          <a:xfrm>
-            <a:off x="6565392" y="4407407"/>
-            <a:ext cx="5074920" cy="1810512"/>
-          </a:xfrm>
-          <a:prstGeom prst="rect">
-            <a:avLst/>
-          </a:prstGeom>
-          <a:noFill/>
-        </p:spPr>
-        <p:txBody>
-          <a:bodyPr wrap="square">
-            <a:spAutoFit/>
-          </a:bodyPr>
-          <a:lstStyle/>
-          <a:p>
-            <a:pPr algn="l"/>
-            <a:r>
-              <a:rPr sz="1100" b="0">
-                <a:solidFill>
-                  <a:srgbClr val="4A4A5A"/>
-                </a:solidFill>
-                <a:latin typeface="Calibri"/>
-              </a:rPr>
-              <a:t>A study with 5–8 users (3 students, 3 admins, 2 mixed) performing realistic tasks would validate or refute these predictions. Heat maps would reveal unexpected fixation patterns. Saccade recordings would show actual vs predicted scan paths. Findings would enable data-driven iteration.</a:t>
             </a:r>
           </a:p>
         </p:txBody>
